--- a/slides/T320_Classificação (Parte II).pptx
+++ b/slides/T320_Classificação (Parte II).pptx
@@ -304,7 +304,7 @@
           <a:p>
             <a:fld id="{144F1436-6906-4D93-B7A2-786C327BFA14}" type="datetimeFigureOut">
               <a:rPr lang="nl-BE" smtClean="0"/>
-              <a:t>21/02/2026</a:t>
+              <a:t>28/02/2026</a:t>
             </a:fld>
             <a:endParaRPr lang="nl-BE"/>
           </a:p>
@@ -469,7 +469,7 @@
           <a:p>
             <a:fld id="{AA8CD09E-2914-4F47-B6C1-51B2C31814C9}" type="datetimeFigureOut">
               <a:rPr lang="pt-BR" smtClean="0"/>
-              <a:t>21/02/2026</a:t>
+              <a:t>28/02/2026</a:t>
             </a:fld>
             <a:endParaRPr lang="pt-BR"/>
           </a:p>
@@ -4485,7 +4485,7 @@
         <p:cNvPr id="1" name="">
           <a:extLst>
             <a:ext uri="{FF2B5EF4-FFF2-40B4-BE49-F238E27FC236}">
-              <a16:creationId xmlns="" xmlns:a16="http://schemas.microsoft.com/office/drawing/2014/main" id="{1BFBDC55-BB4D-2F06-71BF-76ED1A14AFED}"/>
+              <a16:creationId xmlns:a16="http://schemas.microsoft.com/office/drawing/2014/main" xmlns="" id="{1BFBDC55-BB4D-2F06-71BF-76ED1A14AFED}"/>
             </a:ext>
           </a:extLst>
         </p:cNvPr>
@@ -4505,7 +4505,7 @@
           <p:cNvPr id="2" name="Espaço Reservado para Imagem de Slide 1">
             <a:extLst>
               <a:ext uri="{FF2B5EF4-FFF2-40B4-BE49-F238E27FC236}">
-                <a16:creationId xmlns="" xmlns:a16="http://schemas.microsoft.com/office/drawing/2014/main" id="{13FDBDE3-54FF-D34A-6455-B4D01E3B3A99}"/>
+                <a16:creationId xmlns:a16="http://schemas.microsoft.com/office/drawing/2014/main" xmlns="" id="{13FDBDE3-54FF-D34A-6455-B4D01E3B3A99}"/>
               </a:ext>
             </a:extLst>
           </p:cNvPr>
@@ -4523,7 +4523,7 @@
           <p:cNvPr id="3" name="Espaço Reservado para Anotações 2">
             <a:extLst>
               <a:ext uri="{FF2B5EF4-FFF2-40B4-BE49-F238E27FC236}">
-                <a16:creationId xmlns="" xmlns:a16="http://schemas.microsoft.com/office/drawing/2014/main" id="{B159710A-028C-37C9-8B04-776EB9E8B78A}"/>
+                <a16:creationId xmlns:a16="http://schemas.microsoft.com/office/drawing/2014/main" xmlns="" id="{B159710A-028C-37C9-8B04-776EB9E8B78A}"/>
               </a:ext>
             </a:extLst>
           </p:cNvPr>
@@ -4548,7 +4548,7 @@
           <p:cNvPr id="4" name="Espaço Reservado para Número de Slide 3">
             <a:extLst>
               <a:ext uri="{FF2B5EF4-FFF2-40B4-BE49-F238E27FC236}">
-                <a16:creationId xmlns="" xmlns:a16="http://schemas.microsoft.com/office/drawing/2014/main" id="{697E3764-6735-3BB1-4FF7-5946552F4788}"/>
+                <a16:creationId xmlns:a16="http://schemas.microsoft.com/office/drawing/2014/main" xmlns="" id="{697E3764-6735-3BB1-4FF7-5946552F4788}"/>
               </a:ext>
             </a:extLst>
           </p:cNvPr>
@@ -6010,7 +6010,7 @@
           <p:cNvPr id="2" name="Título 1">
             <a:extLst>
               <a:ext uri="{FF2B5EF4-FFF2-40B4-BE49-F238E27FC236}">
-                <a16:creationId xmlns="" xmlns:a16="http://schemas.microsoft.com/office/drawing/2014/main" id="{1DB9B4FF-B06E-403C-A326-BDC64D8FF94E}"/>
+                <a16:creationId xmlns:a16="http://schemas.microsoft.com/office/drawing/2014/main" xmlns="" id="{1DB9B4FF-B06E-403C-A326-BDC64D8FF94E}"/>
               </a:ext>
             </a:extLst>
           </p:cNvPr>
@@ -6047,7 +6047,7 @@
           <p:cNvPr id="3" name="Subtítulo 2">
             <a:extLst>
               <a:ext uri="{FF2B5EF4-FFF2-40B4-BE49-F238E27FC236}">
-                <a16:creationId xmlns="" xmlns:a16="http://schemas.microsoft.com/office/drawing/2014/main" id="{247BDFCE-746E-45BF-A319-4733D58D1632}"/>
+                <a16:creationId xmlns:a16="http://schemas.microsoft.com/office/drawing/2014/main" xmlns="" id="{247BDFCE-746E-45BF-A319-4733D58D1632}"/>
               </a:ext>
             </a:extLst>
           </p:cNvPr>
@@ -6117,7 +6117,7 @@
           <p:cNvPr id="4" name="Espaço Reservado para Data 3">
             <a:extLst>
               <a:ext uri="{FF2B5EF4-FFF2-40B4-BE49-F238E27FC236}">
-                <a16:creationId xmlns="" xmlns:a16="http://schemas.microsoft.com/office/drawing/2014/main" id="{9EDE2778-5372-4104-B96D-968184DA8288}"/>
+                <a16:creationId xmlns:a16="http://schemas.microsoft.com/office/drawing/2014/main" xmlns="" id="{9EDE2778-5372-4104-B96D-968184DA8288}"/>
               </a:ext>
             </a:extLst>
           </p:cNvPr>
@@ -6135,7 +6135,7 @@
           <a:p>
             <a:fld id="{63289F7E-B80B-496E-81B4-D396C37C9454}" type="datetimeFigureOut">
               <a:rPr lang="pt-BR" smtClean="0"/>
-              <a:t>21/02/2026</a:t>
+              <a:t>28/02/2026</a:t>
             </a:fld>
             <a:endParaRPr lang="pt-BR"/>
           </a:p>
@@ -6146,7 +6146,7 @@
           <p:cNvPr id="5" name="Espaço Reservado para Rodapé 4">
             <a:extLst>
               <a:ext uri="{FF2B5EF4-FFF2-40B4-BE49-F238E27FC236}">
-                <a16:creationId xmlns="" xmlns:a16="http://schemas.microsoft.com/office/drawing/2014/main" id="{C1DD0F41-C861-4051-988D-3024A37A4B93}"/>
+                <a16:creationId xmlns:a16="http://schemas.microsoft.com/office/drawing/2014/main" xmlns="" id="{C1DD0F41-C861-4051-988D-3024A37A4B93}"/>
               </a:ext>
             </a:extLst>
           </p:cNvPr>
@@ -6171,7 +6171,7 @@
           <p:cNvPr id="6" name="Espaço Reservado para Número de Slide 5">
             <a:extLst>
               <a:ext uri="{FF2B5EF4-FFF2-40B4-BE49-F238E27FC236}">
-                <a16:creationId xmlns="" xmlns:a16="http://schemas.microsoft.com/office/drawing/2014/main" id="{07E5967E-D980-431A-A5DB-3F0C5030A81E}"/>
+                <a16:creationId xmlns:a16="http://schemas.microsoft.com/office/drawing/2014/main" xmlns="" id="{07E5967E-D980-431A-A5DB-3F0C5030A81E}"/>
               </a:ext>
             </a:extLst>
           </p:cNvPr>
@@ -6230,7 +6230,7 @@
           <p:cNvPr id="2" name="Título 1">
             <a:extLst>
               <a:ext uri="{FF2B5EF4-FFF2-40B4-BE49-F238E27FC236}">
-                <a16:creationId xmlns="" xmlns:a16="http://schemas.microsoft.com/office/drawing/2014/main" id="{9036C49F-3E68-4175-81BA-3C3FEE44308A}"/>
+                <a16:creationId xmlns:a16="http://schemas.microsoft.com/office/drawing/2014/main" xmlns="" id="{9036C49F-3E68-4175-81BA-3C3FEE44308A}"/>
               </a:ext>
             </a:extLst>
           </p:cNvPr>
@@ -6258,7 +6258,7 @@
           <p:cNvPr id="3" name="Espaço Reservado para Texto Vertical 2">
             <a:extLst>
               <a:ext uri="{FF2B5EF4-FFF2-40B4-BE49-F238E27FC236}">
-                <a16:creationId xmlns="" xmlns:a16="http://schemas.microsoft.com/office/drawing/2014/main" id="{426FA736-3DD3-4D4E-B57B-BBE1D8F7D424}"/>
+                <a16:creationId xmlns:a16="http://schemas.microsoft.com/office/drawing/2014/main" xmlns="" id="{426FA736-3DD3-4D4E-B57B-BBE1D8F7D424}"/>
               </a:ext>
             </a:extLst>
           </p:cNvPr>
@@ -6315,7 +6315,7 @@
           <p:cNvPr id="4" name="Espaço Reservado para Data 3">
             <a:extLst>
               <a:ext uri="{FF2B5EF4-FFF2-40B4-BE49-F238E27FC236}">
-                <a16:creationId xmlns="" xmlns:a16="http://schemas.microsoft.com/office/drawing/2014/main" id="{99E8855C-D8FD-48F6-B14E-861E0DE4D915}"/>
+                <a16:creationId xmlns:a16="http://schemas.microsoft.com/office/drawing/2014/main" xmlns="" id="{99E8855C-D8FD-48F6-B14E-861E0DE4D915}"/>
               </a:ext>
             </a:extLst>
           </p:cNvPr>
@@ -6333,7 +6333,7 @@
           <a:p>
             <a:fld id="{63289F7E-B80B-496E-81B4-D396C37C9454}" type="datetimeFigureOut">
               <a:rPr lang="pt-BR" smtClean="0"/>
-              <a:t>21/02/2026</a:t>
+              <a:t>28/02/2026</a:t>
             </a:fld>
             <a:endParaRPr lang="pt-BR"/>
           </a:p>
@@ -6344,7 +6344,7 @@
           <p:cNvPr id="5" name="Espaço Reservado para Rodapé 4">
             <a:extLst>
               <a:ext uri="{FF2B5EF4-FFF2-40B4-BE49-F238E27FC236}">
-                <a16:creationId xmlns="" xmlns:a16="http://schemas.microsoft.com/office/drawing/2014/main" id="{97C0BB88-2F21-42A5-ACFF-83DA47F2D340}"/>
+                <a16:creationId xmlns:a16="http://schemas.microsoft.com/office/drawing/2014/main" xmlns="" id="{97C0BB88-2F21-42A5-ACFF-83DA47F2D340}"/>
               </a:ext>
             </a:extLst>
           </p:cNvPr>
@@ -6369,7 +6369,7 @@
           <p:cNvPr id="6" name="Espaço Reservado para Número de Slide 5">
             <a:extLst>
               <a:ext uri="{FF2B5EF4-FFF2-40B4-BE49-F238E27FC236}">
-                <a16:creationId xmlns="" xmlns:a16="http://schemas.microsoft.com/office/drawing/2014/main" id="{6CB462B3-1F22-4C05-B4B8-7A279FB7D5E9}"/>
+                <a16:creationId xmlns:a16="http://schemas.microsoft.com/office/drawing/2014/main" xmlns="" id="{6CB462B3-1F22-4C05-B4B8-7A279FB7D5E9}"/>
               </a:ext>
             </a:extLst>
           </p:cNvPr>
@@ -6428,7 +6428,7 @@
           <p:cNvPr id="2" name="Título Vertical 1">
             <a:extLst>
               <a:ext uri="{FF2B5EF4-FFF2-40B4-BE49-F238E27FC236}">
-                <a16:creationId xmlns="" xmlns:a16="http://schemas.microsoft.com/office/drawing/2014/main" id="{EAEAB728-701C-4207-A9D5-23FF45C60502}"/>
+                <a16:creationId xmlns:a16="http://schemas.microsoft.com/office/drawing/2014/main" xmlns="" id="{EAEAB728-701C-4207-A9D5-23FF45C60502}"/>
               </a:ext>
             </a:extLst>
           </p:cNvPr>
@@ -6461,7 +6461,7 @@
           <p:cNvPr id="3" name="Espaço Reservado para Texto Vertical 2">
             <a:extLst>
               <a:ext uri="{FF2B5EF4-FFF2-40B4-BE49-F238E27FC236}">
-                <a16:creationId xmlns="" xmlns:a16="http://schemas.microsoft.com/office/drawing/2014/main" id="{BA8C8CCF-7823-480A-9A19-0F664DD17E3B}"/>
+                <a16:creationId xmlns:a16="http://schemas.microsoft.com/office/drawing/2014/main" xmlns="" id="{BA8C8CCF-7823-480A-9A19-0F664DD17E3B}"/>
               </a:ext>
             </a:extLst>
           </p:cNvPr>
@@ -6523,7 +6523,7 @@
           <p:cNvPr id="4" name="Espaço Reservado para Data 3">
             <a:extLst>
               <a:ext uri="{FF2B5EF4-FFF2-40B4-BE49-F238E27FC236}">
-                <a16:creationId xmlns="" xmlns:a16="http://schemas.microsoft.com/office/drawing/2014/main" id="{721D5734-7B1F-425D-942F-6EB73344027C}"/>
+                <a16:creationId xmlns:a16="http://schemas.microsoft.com/office/drawing/2014/main" xmlns="" id="{721D5734-7B1F-425D-942F-6EB73344027C}"/>
               </a:ext>
             </a:extLst>
           </p:cNvPr>
@@ -6541,7 +6541,7 @@
           <a:p>
             <a:fld id="{63289F7E-B80B-496E-81B4-D396C37C9454}" type="datetimeFigureOut">
               <a:rPr lang="pt-BR" smtClean="0"/>
-              <a:t>21/02/2026</a:t>
+              <a:t>28/02/2026</a:t>
             </a:fld>
             <a:endParaRPr lang="pt-BR"/>
           </a:p>
@@ -6552,7 +6552,7 @@
           <p:cNvPr id="5" name="Espaço Reservado para Rodapé 4">
             <a:extLst>
               <a:ext uri="{FF2B5EF4-FFF2-40B4-BE49-F238E27FC236}">
-                <a16:creationId xmlns="" xmlns:a16="http://schemas.microsoft.com/office/drawing/2014/main" id="{1E1AAEAC-F08D-45FE-89EC-B1B349A868C9}"/>
+                <a16:creationId xmlns:a16="http://schemas.microsoft.com/office/drawing/2014/main" xmlns="" id="{1E1AAEAC-F08D-45FE-89EC-B1B349A868C9}"/>
               </a:ext>
             </a:extLst>
           </p:cNvPr>
@@ -6577,7 +6577,7 @@
           <p:cNvPr id="6" name="Espaço Reservado para Número de Slide 5">
             <a:extLst>
               <a:ext uri="{FF2B5EF4-FFF2-40B4-BE49-F238E27FC236}">
-                <a16:creationId xmlns="" xmlns:a16="http://schemas.microsoft.com/office/drawing/2014/main" id="{BAA44493-9911-47B2-87A6-C2141A972BC8}"/>
+                <a16:creationId xmlns:a16="http://schemas.microsoft.com/office/drawing/2014/main" xmlns="" id="{BAA44493-9911-47B2-87A6-C2141A972BC8}"/>
               </a:ext>
             </a:extLst>
           </p:cNvPr>
@@ -6636,7 +6636,7 @@
           <p:cNvPr id="2" name="Título 1">
             <a:extLst>
               <a:ext uri="{FF2B5EF4-FFF2-40B4-BE49-F238E27FC236}">
-                <a16:creationId xmlns="" xmlns:a16="http://schemas.microsoft.com/office/drawing/2014/main" id="{71BD44A5-8F21-4626-A01D-48A1C874B1D5}"/>
+                <a16:creationId xmlns:a16="http://schemas.microsoft.com/office/drawing/2014/main" xmlns="" id="{71BD44A5-8F21-4626-A01D-48A1C874B1D5}"/>
               </a:ext>
             </a:extLst>
           </p:cNvPr>
@@ -6664,7 +6664,7 @@
           <p:cNvPr id="3" name="Espaço Reservado para Conteúdo 2">
             <a:extLst>
               <a:ext uri="{FF2B5EF4-FFF2-40B4-BE49-F238E27FC236}">
-                <a16:creationId xmlns="" xmlns:a16="http://schemas.microsoft.com/office/drawing/2014/main" id="{B79E8085-65A9-48AA-951D-71D978BFF4ED}"/>
+                <a16:creationId xmlns:a16="http://schemas.microsoft.com/office/drawing/2014/main" xmlns="" id="{B79E8085-65A9-48AA-951D-71D978BFF4ED}"/>
               </a:ext>
             </a:extLst>
           </p:cNvPr>
@@ -6721,7 +6721,7 @@
           <p:cNvPr id="4" name="Espaço Reservado para Data 3">
             <a:extLst>
               <a:ext uri="{FF2B5EF4-FFF2-40B4-BE49-F238E27FC236}">
-                <a16:creationId xmlns="" xmlns:a16="http://schemas.microsoft.com/office/drawing/2014/main" id="{F05BE1AF-51EA-425D-B188-DE7BD675009F}"/>
+                <a16:creationId xmlns:a16="http://schemas.microsoft.com/office/drawing/2014/main" xmlns="" id="{F05BE1AF-51EA-425D-B188-DE7BD675009F}"/>
               </a:ext>
             </a:extLst>
           </p:cNvPr>
@@ -6739,7 +6739,7 @@
           <a:p>
             <a:fld id="{63289F7E-B80B-496E-81B4-D396C37C9454}" type="datetimeFigureOut">
               <a:rPr lang="pt-BR" smtClean="0"/>
-              <a:t>21/02/2026</a:t>
+              <a:t>28/02/2026</a:t>
             </a:fld>
             <a:endParaRPr lang="pt-BR"/>
           </a:p>
@@ -6750,7 +6750,7 @@
           <p:cNvPr id="5" name="Espaço Reservado para Rodapé 4">
             <a:extLst>
               <a:ext uri="{FF2B5EF4-FFF2-40B4-BE49-F238E27FC236}">
-                <a16:creationId xmlns="" xmlns:a16="http://schemas.microsoft.com/office/drawing/2014/main" id="{121BE632-29CF-4CB9-B365-C9EF38F89BE6}"/>
+                <a16:creationId xmlns:a16="http://schemas.microsoft.com/office/drawing/2014/main" xmlns="" id="{121BE632-29CF-4CB9-B365-C9EF38F89BE6}"/>
               </a:ext>
             </a:extLst>
           </p:cNvPr>
@@ -6775,7 +6775,7 @@
           <p:cNvPr id="6" name="Espaço Reservado para Número de Slide 5">
             <a:extLst>
               <a:ext uri="{FF2B5EF4-FFF2-40B4-BE49-F238E27FC236}">
-                <a16:creationId xmlns="" xmlns:a16="http://schemas.microsoft.com/office/drawing/2014/main" id="{60CF3DD1-9AEC-4A57-B461-4E4DD86FAC18}"/>
+                <a16:creationId xmlns:a16="http://schemas.microsoft.com/office/drawing/2014/main" xmlns="" id="{60CF3DD1-9AEC-4A57-B461-4E4DD86FAC18}"/>
               </a:ext>
             </a:extLst>
           </p:cNvPr>
@@ -6834,7 +6834,7 @@
           <p:cNvPr id="2" name="Título 1">
             <a:extLst>
               <a:ext uri="{FF2B5EF4-FFF2-40B4-BE49-F238E27FC236}">
-                <a16:creationId xmlns="" xmlns:a16="http://schemas.microsoft.com/office/drawing/2014/main" id="{34AB2FF0-A4D7-4E28-991D-FF26140D5988}"/>
+                <a16:creationId xmlns:a16="http://schemas.microsoft.com/office/drawing/2014/main" xmlns="" id="{34AB2FF0-A4D7-4E28-991D-FF26140D5988}"/>
               </a:ext>
             </a:extLst>
           </p:cNvPr>
@@ -6871,7 +6871,7 @@
           <p:cNvPr id="3" name="Espaço Reservado para Texto 2">
             <a:extLst>
               <a:ext uri="{FF2B5EF4-FFF2-40B4-BE49-F238E27FC236}">
-                <a16:creationId xmlns="" xmlns:a16="http://schemas.microsoft.com/office/drawing/2014/main" id="{E2AC45B0-4145-40DB-8E61-105461170604}"/>
+                <a16:creationId xmlns:a16="http://schemas.microsoft.com/office/drawing/2014/main" xmlns="" id="{E2AC45B0-4145-40DB-8E61-105461170604}"/>
               </a:ext>
             </a:extLst>
           </p:cNvPr>
@@ -6996,7 +6996,7 @@
           <p:cNvPr id="4" name="Espaço Reservado para Data 3">
             <a:extLst>
               <a:ext uri="{FF2B5EF4-FFF2-40B4-BE49-F238E27FC236}">
-                <a16:creationId xmlns="" xmlns:a16="http://schemas.microsoft.com/office/drawing/2014/main" id="{50F1D3FB-740A-4EBA-A309-2CE71D12ECFB}"/>
+                <a16:creationId xmlns:a16="http://schemas.microsoft.com/office/drawing/2014/main" xmlns="" id="{50F1D3FB-740A-4EBA-A309-2CE71D12ECFB}"/>
               </a:ext>
             </a:extLst>
           </p:cNvPr>
@@ -7014,7 +7014,7 @@
           <a:p>
             <a:fld id="{63289F7E-B80B-496E-81B4-D396C37C9454}" type="datetimeFigureOut">
               <a:rPr lang="pt-BR" smtClean="0"/>
-              <a:t>21/02/2026</a:t>
+              <a:t>28/02/2026</a:t>
             </a:fld>
             <a:endParaRPr lang="pt-BR"/>
           </a:p>
@@ -7025,7 +7025,7 @@
           <p:cNvPr id="5" name="Espaço Reservado para Rodapé 4">
             <a:extLst>
               <a:ext uri="{FF2B5EF4-FFF2-40B4-BE49-F238E27FC236}">
-                <a16:creationId xmlns="" xmlns:a16="http://schemas.microsoft.com/office/drawing/2014/main" id="{BDCAB18F-8715-4465-A940-F9C193A2ACE9}"/>
+                <a16:creationId xmlns:a16="http://schemas.microsoft.com/office/drawing/2014/main" xmlns="" id="{BDCAB18F-8715-4465-A940-F9C193A2ACE9}"/>
               </a:ext>
             </a:extLst>
           </p:cNvPr>
@@ -7050,7 +7050,7 @@
           <p:cNvPr id="6" name="Espaço Reservado para Número de Slide 5">
             <a:extLst>
               <a:ext uri="{FF2B5EF4-FFF2-40B4-BE49-F238E27FC236}">
-                <a16:creationId xmlns="" xmlns:a16="http://schemas.microsoft.com/office/drawing/2014/main" id="{353466C6-8248-429F-8056-FF040BF509EB}"/>
+                <a16:creationId xmlns:a16="http://schemas.microsoft.com/office/drawing/2014/main" xmlns="" id="{353466C6-8248-429F-8056-FF040BF509EB}"/>
               </a:ext>
             </a:extLst>
           </p:cNvPr>
@@ -7109,7 +7109,7 @@
           <p:cNvPr id="2" name="Título 1">
             <a:extLst>
               <a:ext uri="{FF2B5EF4-FFF2-40B4-BE49-F238E27FC236}">
-                <a16:creationId xmlns="" xmlns:a16="http://schemas.microsoft.com/office/drawing/2014/main" id="{BC7BB9F0-F14B-4A91-B2B7-35BC47FE4DE7}"/>
+                <a16:creationId xmlns:a16="http://schemas.microsoft.com/office/drawing/2014/main" xmlns="" id="{BC7BB9F0-F14B-4A91-B2B7-35BC47FE4DE7}"/>
               </a:ext>
             </a:extLst>
           </p:cNvPr>
@@ -7137,7 +7137,7 @@
           <p:cNvPr id="3" name="Espaço Reservado para Conteúdo 2">
             <a:extLst>
               <a:ext uri="{FF2B5EF4-FFF2-40B4-BE49-F238E27FC236}">
-                <a16:creationId xmlns="" xmlns:a16="http://schemas.microsoft.com/office/drawing/2014/main" id="{EC1FC1C4-73DA-47A6-8496-B0B457F7D39A}"/>
+                <a16:creationId xmlns:a16="http://schemas.microsoft.com/office/drawing/2014/main" xmlns="" id="{EC1FC1C4-73DA-47A6-8496-B0B457F7D39A}"/>
               </a:ext>
             </a:extLst>
           </p:cNvPr>
@@ -7199,7 +7199,7 @@
           <p:cNvPr id="4" name="Espaço Reservado para Conteúdo 3">
             <a:extLst>
               <a:ext uri="{FF2B5EF4-FFF2-40B4-BE49-F238E27FC236}">
-                <a16:creationId xmlns="" xmlns:a16="http://schemas.microsoft.com/office/drawing/2014/main" id="{E92F06A8-A449-4D92-9912-76873E529B38}"/>
+                <a16:creationId xmlns:a16="http://schemas.microsoft.com/office/drawing/2014/main" xmlns="" id="{E92F06A8-A449-4D92-9912-76873E529B38}"/>
               </a:ext>
             </a:extLst>
           </p:cNvPr>
@@ -7261,7 +7261,7 @@
           <p:cNvPr id="5" name="Espaço Reservado para Data 4">
             <a:extLst>
               <a:ext uri="{FF2B5EF4-FFF2-40B4-BE49-F238E27FC236}">
-                <a16:creationId xmlns="" xmlns:a16="http://schemas.microsoft.com/office/drawing/2014/main" id="{938070A4-BC2F-4D55-BD8D-DEAF11BB9EE9}"/>
+                <a16:creationId xmlns:a16="http://schemas.microsoft.com/office/drawing/2014/main" xmlns="" id="{938070A4-BC2F-4D55-BD8D-DEAF11BB9EE9}"/>
               </a:ext>
             </a:extLst>
           </p:cNvPr>
@@ -7279,7 +7279,7 @@
           <a:p>
             <a:fld id="{63289F7E-B80B-496E-81B4-D396C37C9454}" type="datetimeFigureOut">
               <a:rPr lang="pt-BR" smtClean="0"/>
-              <a:t>21/02/2026</a:t>
+              <a:t>28/02/2026</a:t>
             </a:fld>
             <a:endParaRPr lang="pt-BR"/>
           </a:p>
@@ -7290,7 +7290,7 @@
           <p:cNvPr id="6" name="Espaço Reservado para Rodapé 5">
             <a:extLst>
               <a:ext uri="{FF2B5EF4-FFF2-40B4-BE49-F238E27FC236}">
-                <a16:creationId xmlns="" xmlns:a16="http://schemas.microsoft.com/office/drawing/2014/main" id="{45CC2DB8-844A-465F-BA9A-7734C80C7F43}"/>
+                <a16:creationId xmlns:a16="http://schemas.microsoft.com/office/drawing/2014/main" xmlns="" id="{45CC2DB8-844A-465F-BA9A-7734C80C7F43}"/>
               </a:ext>
             </a:extLst>
           </p:cNvPr>
@@ -7315,7 +7315,7 @@
           <p:cNvPr id="7" name="Espaço Reservado para Número de Slide 6">
             <a:extLst>
               <a:ext uri="{FF2B5EF4-FFF2-40B4-BE49-F238E27FC236}">
-                <a16:creationId xmlns="" xmlns:a16="http://schemas.microsoft.com/office/drawing/2014/main" id="{4CC606A8-097B-4040-94E0-CD8C88280D8F}"/>
+                <a16:creationId xmlns:a16="http://schemas.microsoft.com/office/drawing/2014/main" xmlns="" id="{4CC606A8-097B-4040-94E0-CD8C88280D8F}"/>
               </a:ext>
             </a:extLst>
           </p:cNvPr>
@@ -7374,7 +7374,7 @@
           <p:cNvPr id="2" name="Título 1">
             <a:extLst>
               <a:ext uri="{FF2B5EF4-FFF2-40B4-BE49-F238E27FC236}">
-                <a16:creationId xmlns="" xmlns:a16="http://schemas.microsoft.com/office/drawing/2014/main" id="{76D66686-0143-4CB6-8C09-BA326F1E7ACA}"/>
+                <a16:creationId xmlns:a16="http://schemas.microsoft.com/office/drawing/2014/main" xmlns="" id="{76D66686-0143-4CB6-8C09-BA326F1E7ACA}"/>
               </a:ext>
             </a:extLst>
           </p:cNvPr>
@@ -7407,7 +7407,7 @@
           <p:cNvPr id="3" name="Espaço Reservado para Texto 2">
             <a:extLst>
               <a:ext uri="{FF2B5EF4-FFF2-40B4-BE49-F238E27FC236}">
-                <a16:creationId xmlns="" xmlns:a16="http://schemas.microsoft.com/office/drawing/2014/main" id="{0227AB85-F59E-4BCE-B846-4FA0992C2F23}"/>
+                <a16:creationId xmlns:a16="http://schemas.microsoft.com/office/drawing/2014/main" xmlns="" id="{0227AB85-F59E-4BCE-B846-4FA0992C2F23}"/>
               </a:ext>
             </a:extLst>
           </p:cNvPr>
@@ -7478,7 +7478,7 @@
           <p:cNvPr id="4" name="Espaço Reservado para Conteúdo 3">
             <a:extLst>
               <a:ext uri="{FF2B5EF4-FFF2-40B4-BE49-F238E27FC236}">
-                <a16:creationId xmlns="" xmlns:a16="http://schemas.microsoft.com/office/drawing/2014/main" id="{3373456C-7319-4D0A-827D-D29F6B083F5D}"/>
+                <a16:creationId xmlns:a16="http://schemas.microsoft.com/office/drawing/2014/main" xmlns="" id="{3373456C-7319-4D0A-827D-D29F6B083F5D}"/>
               </a:ext>
             </a:extLst>
           </p:cNvPr>
@@ -7540,7 +7540,7 @@
           <p:cNvPr id="5" name="Espaço Reservado para Texto 4">
             <a:extLst>
               <a:ext uri="{FF2B5EF4-FFF2-40B4-BE49-F238E27FC236}">
-                <a16:creationId xmlns="" xmlns:a16="http://schemas.microsoft.com/office/drawing/2014/main" id="{4CD109D0-2E83-4262-8029-A871CEC47406}"/>
+                <a16:creationId xmlns:a16="http://schemas.microsoft.com/office/drawing/2014/main" xmlns="" id="{4CD109D0-2E83-4262-8029-A871CEC47406}"/>
               </a:ext>
             </a:extLst>
           </p:cNvPr>
@@ -7611,7 +7611,7 @@
           <p:cNvPr id="6" name="Espaço Reservado para Conteúdo 5">
             <a:extLst>
               <a:ext uri="{FF2B5EF4-FFF2-40B4-BE49-F238E27FC236}">
-                <a16:creationId xmlns="" xmlns:a16="http://schemas.microsoft.com/office/drawing/2014/main" id="{AD706E3A-CFBB-4A6C-A65F-D0360A9E74FE}"/>
+                <a16:creationId xmlns:a16="http://schemas.microsoft.com/office/drawing/2014/main" xmlns="" id="{AD706E3A-CFBB-4A6C-A65F-D0360A9E74FE}"/>
               </a:ext>
             </a:extLst>
           </p:cNvPr>
@@ -7673,7 +7673,7 @@
           <p:cNvPr id="7" name="Espaço Reservado para Data 6">
             <a:extLst>
               <a:ext uri="{FF2B5EF4-FFF2-40B4-BE49-F238E27FC236}">
-                <a16:creationId xmlns="" xmlns:a16="http://schemas.microsoft.com/office/drawing/2014/main" id="{4172C0E5-5AF0-4805-BB51-443733CD2BD5}"/>
+                <a16:creationId xmlns:a16="http://schemas.microsoft.com/office/drawing/2014/main" xmlns="" id="{4172C0E5-5AF0-4805-BB51-443733CD2BD5}"/>
               </a:ext>
             </a:extLst>
           </p:cNvPr>
@@ -7691,7 +7691,7 @@
           <a:p>
             <a:fld id="{63289F7E-B80B-496E-81B4-D396C37C9454}" type="datetimeFigureOut">
               <a:rPr lang="pt-BR" smtClean="0"/>
-              <a:t>21/02/2026</a:t>
+              <a:t>28/02/2026</a:t>
             </a:fld>
             <a:endParaRPr lang="pt-BR"/>
           </a:p>
@@ -7702,7 +7702,7 @@
           <p:cNvPr id="8" name="Espaço Reservado para Rodapé 7">
             <a:extLst>
               <a:ext uri="{FF2B5EF4-FFF2-40B4-BE49-F238E27FC236}">
-                <a16:creationId xmlns="" xmlns:a16="http://schemas.microsoft.com/office/drawing/2014/main" id="{0E801648-156F-497E-99CF-797DF48051E1}"/>
+                <a16:creationId xmlns:a16="http://schemas.microsoft.com/office/drawing/2014/main" xmlns="" id="{0E801648-156F-497E-99CF-797DF48051E1}"/>
               </a:ext>
             </a:extLst>
           </p:cNvPr>
@@ -7727,7 +7727,7 @@
           <p:cNvPr id="9" name="Espaço Reservado para Número de Slide 8">
             <a:extLst>
               <a:ext uri="{FF2B5EF4-FFF2-40B4-BE49-F238E27FC236}">
-                <a16:creationId xmlns="" xmlns:a16="http://schemas.microsoft.com/office/drawing/2014/main" id="{EEE23D32-80E7-4796-A137-66BF842E4B53}"/>
+                <a16:creationId xmlns:a16="http://schemas.microsoft.com/office/drawing/2014/main" xmlns="" id="{EEE23D32-80E7-4796-A137-66BF842E4B53}"/>
               </a:ext>
             </a:extLst>
           </p:cNvPr>
@@ -7786,7 +7786,7 @@
           <p:cNvPr id="2" name="Título 1">
             <a:extLst>
               <a:ext uri="{FF2B5EF4-FFF2-40B4-BE49-F238E27FC236}">
-                <a16:creationId xmlns="" xmlns:a16="http://schemas.microsoft.com/office/drawing/2014/main" id="{2BCE2379-C78F-47E1-8CFC-B846E7AF148D}"/>
+                <a16:creationId xmlns:a16="http://schemas.microsoft.com/office/drawing/2014/main" xmlns="" id="{2BCE2379-C78F-47E1-8CFC-B846E7AF148D}"/>
               </a:ext>
             </a:extLst>
           </p:cNvPr>
@@ -7814,7 +7814,7 @@
           <p:cNvPr id="3" name="Espaço Reservado para Data 2">
             <a:extLst>
               <a:ext uri="{FF2B5EF4-FFF2-40B4-BE49-F238E27FC236}">
-                <a16:creationId xmlns="" xmlns:a16="http://schemas.microsoft.com/office/drawing/2014/main" id="{342600A9-7F92-4E22-9D94-E4717252A817}"/>
+                <a16:creationId xmlns:a16="http://schemas.microsoft.com/office/drawing/2014/main" xmlns="" id="{342600A9-7F92-4E22-9D94-E4717252A817}"/>
               </a:ext>
             </a:extLst>
           </p:cNvPr>
@@ -7832,7 +7832,7 @@
           <a:p>
             <a:fld id="{63289F7E-B80B-496E-81B4-D396C37C9454}" type="datetimeFigureOut">
               <a:rPr lang="pt-BR" smtClean="0"/>
-              <a:t>21/02/2026</a:t>
+              <a:t>28/02/2026</a:t>
             </a:fld>
             <a:endParaRPr lang="pt-BR"/>
           </a:p>
@@ -7843,7 +7843,7 @@
           <p:cNvPr id="4" name="Espaço Reservado para Rodapé 3">
             <a:extLst>
               <a:ext uri="{FF2B5EF4-FFF2-40B4-BE49-F238E27FC236}">
-                <a16:creationId xmlns="" xmlns:a16="http://schemas.microsoft.com/office/drawing/2014/main" id="{192E6BED-F546-40CC-A2DF-99CBA853654E}"/>
+                <a16:creationId xmlns:a16="http://schemas.microsoft.com/office/drawing/2014/main" xmlns="" id="{192E6BED-F546-40CC-A2DF-99CBA853654E}"/>
               </a:ext>
             </a:extLst>
           </p:cNvPr>
@@ -7868,7 +7868,7 @@
           <p:cNvPr id="5" name="Espaço Reservado para Número de Slide 4">
             <a:extLst>
               <a:ext uri="{FF2B5EF4-FFF2-40B4-BE49-F238E27FC236}">
-                <a16:creationId xmlns="" xmlns:a16="http://schemas.microsoft.com/office/drawing/2014/main" id="{6091CC40-A8C4-4063-80EB-CC5099621678}"/>
+                <a16:creationId xmlns:a16="http://schemas.microsoft.com/office/drawing/2014/main" xmlns="" id="{6091CC40-A8C4-4063-80EB-CC5099621678}"/>
               </a:ext>
             </a:extLst>
           </p:cNvPr>
@@ -7927,7 +7927,7 @@
           <p:cNvPr id="2" name="Espaço Reservado para Data 1">
             <a:extLst>
               <a:ext uri="{FF2B5EF4-FFF2-40B4-BE49-F238E27FC236}">
-                <a16:creationId xmlns="" xmlns:a16="http://schemas.microsoft.com/office/drawing/2014/main" id="{DD19515C-212C-4EAE-84A3-8FF4BC844F1B}"/>
+                <a16:creationId xmlns:a16="http://schemas.microsoft.com/office/drawing/2014/main" xmlns="" id="{DD19515C-212C-4EAE-84A3-8FF4BC844F1B}"/>
               </a:ext>
             </a:extLst>
           </p:cNvPr>
@@ -7945,7 +7945,7 @@
           <a:p>
             <a:fld id="{63289F7E-B80B-496E-81B4-D396C37C9454}" type="datetimeFigureOut">
               <a:rPr lang="pt-BR" smtClean="0"/>
-              <a:t>21/02/2026</a:t>
+              <a:t>28/02/2026</a:t>
             </a:fld>
             <a:endParaRPr lang="pt-BR"/>
           </a:p>
@@ -7956,7 +7956,7 @@
           <p:cNvPr id="3" name="Espaço Reservado para Rodapé 2">
             <a:extLst>
               <a:ext uri="{FF2B5EF4-FFF2-40B4-BE49-F238E27FC236}">
-                <a16:creationId xmlns="" xmlns:a16="http://schemas.microsoft.com/office/drawing/2014/main" id="{94D3D120-B3E8-4C96-861D-7A4F12F49B3A}"/>
+                <a16:creationId xmlns:a16="http://schemas.microsoft.com/office/drawing/2014/main" xmlns="" id="{94D3D120-B3E8-4C96-861D-7A4F12F49B3A}"/>
               </a:ext>
             </a:extLst>
           </p:cNvPr>
@@ -7981,7 +7981,7 @@
           <p:cNvPr id="4" name="Espaço Reservado para Número de Slide 3">
             <a:extLst>
               <a:ext uri="{FF2B5EF4-FFF2-40B4-BE49-F238E27FC236}">
-                <a16:creationId xmlns="" xmlns:a16="http://schemas.microsoft.com/office/drawing/2014/main" id="{42E49B68-FA1B-468B-9F17-D5C09243D454}"/>
+                <a16:creationId xmlns:a16="http://schemas.microsoft.com/office/drawing/2014/main" xmlns="" id="{42E49B68-FA1B-468B-9F17-D5C09243D454}"/>
               </a:ext>
             </a:extLst>
           </p:cNvPr>
@@ -8040,7 +8040,7 @@
           <p:cNvPr id="2" name="Título 1">
             <a:extLst>
               <a:ext uri="{FF2B5EF4-FFF2-40B4-BE49-F238E27FC236}">
-                <a16:creationId xmlns="" xmlns:a16="http://schemas.microsoft.com/office/drawing/2014/main" id="{1C17BCBE-A897-4319-85EC-D87909C24980}"/>
+                <a16:creationId xmlns:a16="http://schemas.microsoft.com/office/drawing/2014/main" xmlns="" id="{1C17BCBE-A897-4319-85EC-D87909C24980}"/>
               </a:ext>
             </a:extLst>
           </p:cNvPr>
@@ -8077,7 +8077,7 @@
           <p:cNvPr id="3" name="Espaço Reservado para Conteúdo 2">
             <a:extLst>
               <a:ext uri="{FF2B5EF4-FFF2-40B4-BE49-F238E27FC236}">
-                <a16:creationId xmlns="" xmlns:a16="http://schemas.microsoft.com/office/drawing/2014/main" id="{4226F885-0204-4913-868B-4B8B82576F17}"/>
+                <a16:creationId xmlns:a16="http://schemas.microsoft.com/office/drawing/2014/main" xmlns="" id="{4226F885-0204-4913-868B-4B8B82576F17}"/>
               </a:ext>
             </a:extLst>
           </p:cNvPr>
@@ -8167,7 +8167,7 @@
           <p:cNvPr id="4" name="Espaço Reservado para Texto 3">
             <a:extLst>
               <a:ext uri="{FF2B5EF4-FFF2-40B4-BE49-F238E27FC236}">
-                <a16:creationId xmlns="" xmlns:a16="http://schemas.microsoft.com/office/drawing/2014/main" id="{00F9F784-A858-441B-8AB5-697098141751}"/>
+                <a16:creationId xmlns:a16="http://schemas.microsoft.com/office/drawing/2014/main" xmlns="" id="{00F9F784-A858-441B-8AB5-697098141751}"/>
               </a:ext>
             </a:extLst>
           </p:cNvPr>
@@ -8238,7 +8238,7 @@
           <p:cNvPr id="5" name="Espaço Reservado para Data 4">
             <a:extLst>
               <a:ext uri="{FF2B5EF4-FFF2-40B4-BE49-F238E27FC236}">
-                <a16:creationId xmlns="" xmlns:a16="http://schemas.microsoft.com/office/drawing/2014/main" id="{A4DC363A-5000-472E-8B17-02E7DCB8840A}"/>
+                <a16:creationId xmlns:a16="http://schemas.microsoft.com/office/drawing/2014/main" xmlns="" id="{A4DC363A-5000-472E-8B17-02E7DCB8840A}"/>
               </a:ext>
             </a:extLst>
           </p:cNvPr>
@@ -8256,7 +8256,7 @@
           <a:p>
             <a:fld id="{63289F7E-B80B-496E-81B4-D396C37C9454}" type="datetimeFigureOut">
               <a:rPr lang="pt-BR" smtClean="0"/>
-              <a:t>21/02/2026</a:t>
+              <a:t>28/02/2026</a:t>
             </a:fld>
             <a:endParaRPr lang="pt-BR"/>
           </a:p>
@@ -8267,7 +8267,7 @@
           <p:cNvPr id="6" name="Espaço Reservado para Rodapé 5">
             <a:extLst>
               <a:ext uri="{FF2B5EF4-FFF2-40B4-BE49-F238E27FC236}">
-                <a16:creationId xmlns="" xmlns:a16="http://schemas.microsoft.com/office/drawing/2014/main" id="{5548425D-2C21-4C56-BAD4-662978775C28}"/>
+                <a16:creationId xmlns:a16="http://schemas.microsoft.com/office/drawing/2014/main" xmlns="" id="{5548425D-2C21-4C56-BAD4-662978775C28}"/>
               </a:ext>
             </a:extLst>
           </p:cNvPr>
@@ -8292,7 +8292,7 @@
           <p:cNvPr id="7" name="Espaço Reservado para Número de Slide 6">
             <a:extLst>
               <a:ext uri="{FF2B5EF4-FFF2-40B4-BE49-F238E27FC236}">
-                <a16:creationId xmlns="" xmlns:a16="http://schemas.microsoft.com/office/drawing/2014/main" id="{C63E9726-E64C-42B2-AE8A-8C235A956B48}"/>
+                <a16:creationId xmlns:a16="http://schemas.microsoft.com/office/drawing/2014/main" xmlns="" id="{C63E9726-E64C-42B2-AE8A-8C235A956B48}"/>
               </a:ext>
             </a:extLst>
           </p:cNvPr>
@@ -8351,7 +8351,7 @@
           <p:cNvPr id="2" name="Título 1">
             <a:extLst>
               <a:ext uri="{FF2B5EF4-FFF2-40B4-BE49-F238E27FC236}">
-                <a16:creationId xmlns="" xmlns:a16="http://schemas.microsoft.com/office/drawing/2014/main" id="{11086A78-3E74-450C-96A6-CA8AC37AF772}"/>
+                <a16:creationId xmlns:a16="http://schemas.microsoft.com/office/drawing/2014/main" xmlns="" id="{11086A78-3E74-450C-96A6-CA8AC37AF772}"/>
               </a:ext>
             </a:extLst>
           </p:cNvPr>
@@ -8388,7 +8388,7 @@
           <p:cNvPr id="3" name="Espaço Reservado para Imagem 2">
             <a:extLst>
               <a:ext uri="{FF2B5EF4-FFF2-40B4-BE49-F238E27FC236}">
-                <a16:creationId xmlns="" xmlns:a16="http://schemas.microsoft.com/office/drawing/2014/main" id="{5F5B7312-975A-4DBC-9B2F-3652ADA006FD}"/>
+                <a16:creationId xmlns:a16="http://schemas.microsoft.com/office/drawing/2014/main" xmlns="" id="{5F5B7312-975A-4DBC-9B2F-3652ADA006FD}"/>
               </a:ext>
             </a:extLst>
           </p:cNvPr>
@@ -8455,7 +8455,7 @@
           <p:cNvPr id="4" name="Espaço Reservado para Texto 3">
             <a:extLst>
               <a:ext uri="{FF2B5EF4-FFF2-40B4-BE49-F238E27FC236}">
-                <a16:creationId xmlns="" xmlns:a16="http://schemas.microsoft.com/office/drawing/2014/main" id="{AAF805F5-1DFF-41C6-944C-7D79FE0D0963}"/>
+                <a16:creationId xmlns:a16="http://schemas.microsoft.com/office/drawing/2014/main" xmlns="" id="{AAF805F5-1DFF-41C6-944C-7D79FE0D0963}"/>
               </a:ext>
             </a:extLst>
           </p:cNvPr>
@@ -8526,7 +8526,7 @@
           <p:cNvPr id="5" name="Espaço Reservado para Data 4">
             <a:extLst>
               <a:ext uri="{FF2B5EF4-FFF2-40B4-BE49-F238E27FC236}">
-                <a16:creationId xmlns="" xmlns:a16="http://schemas.microsoft.com/office/drawing/2014/main" id="{02113D81-8665-4516-BD81-C6A1F254EECD}"/>
+                <a16:creationId xmlns:a16="http://schemas.microsoft.com/office/drawing/2014/main" xmlns="" id="{02113D81-8665-4516-BD81-C6A1F254EECD}"/>
               </a:ext>
             </a:extLst>
           </p:cNvPr>
@@ -8544,7 +8544,7 @@
           <a:p>
             <a:fld id="{63289F7E-B80B-496E-81B4-D396C37C9454}" type="datetimeFigureOut">
               <a:rPr lang="pt-BR" smtClean="0"/>
-              <a:t>21/02/2026</a:t>
+              <a:t>28/02/2026</a:t>
             </a:fld>
             <a:endParaRPr lang="pt-BR"/>
           </a:p>
@@ -8555,7 +8555,7 @@
           <p:cNvPr id="6" name="Espaço Reservado para Rodapé 5">
             <a:extLst>
               <a:ext uri="{FF2B5EF4-FFF2-40B4-BE49-F238E27FC236}">
-                <a16:creationId xmlns="" xmlns:a16="http://schemas.microsoft.com/office/drawing/2014/main" id="{2B00C88B-FF32-40AA-A187-727D96FD7862}"/>
+                <a16:creationId xmlns:a16="http://schemas.microsoft.com/office/drawing/2014/main" xmlns="" id="{2B00C88B-FF32-40AA-A187-727D96FD7862}"/>
               </a:ext>
             </a:extLst>
           </p:cNvPr>
@@ -8580,7 +8580,7 @@
           <p:cNvPr id="7" name="Espaço Reservado para Número de Slide 6">
             <a:extLst>
               <a:ext uri="{FF2B5EF4-FFF2-40B4-BE49-F238E27FC236}">
-                <a16:creationId xmlns="" xmlns:a16="http://schemas.microsoft.com/office/drawing/2014/main" id="{A04D1A2D-69F7-4B8F-A730-BC26DC340BA6}"/>
+                <a16:creationId xmlns:a16="http://schemas.microsoft.com/office/drawing/2014/main" xmlns="" id="{A04D1A2D-69F7-4B8F-A730-BC26DC340BA6}"/>
               </a:ext>
             </a:extLst>
           </p:cNvPr>
@@ -8644,7 +8644,7 @@
           <p:cNvPr id="2" name="Espaço Reservado para Título 1">
             <a:extLst>
               <a:ext uri="{FF2B5EF4-FFF2-40B4-BE49-F238E27FC236}">
-                <a16:creationId xmlns="" xmlns:a16="http://schemas.microsoft.com/office/drawing/2014/main" id="{E69A0273-1966-4A1B-9370-4C1CE5036371}"/>
+                <a16:creationId xmlns:a16="http://schemas.microsoft.com/office/drawing/2014/main" xmlns="" id="{E69A0273-1966-4A1B-9370-4C1CE5036371}"/>
               </a:ext>
             </a:extLst>
           </p:cNvPr>
@@ -8682,7 +8682,7 @@
           <p:cNvPr id="3" name="Espaço Reservado para Texto 2">
             <a:extLst>
               <a:ext uri="{FF2B5EF4-FFF2-40B4-BE49-F238E27FC236}">
-                <a16:creationId xmlns="" xmlns:a16="http://schemas.microsoft.com/office/drawing/2014/main" id="{3B9CF87A-0448-49A7-AB25-EBC1D56A40EF}"/>
+                <a16:creationId xmlns:a16="http://schemas.microsoft.com/office/drawing/2014/main" xmlns="" id="{3B9CF87A-0448-49A7-AB25-EBC1D56A40EF}"/>
               </a:ext>
             </a:extLst>
           </p:cNvPr>
@@ -8749,7 +8749,7 @@
           <p:cNvPr id="4" name="Espaço Reservado para Data 3">
             <a:extLst>
               <a:ext uri="{FF2B5EF4-FFF2-40B4-BE49-F238E27FC236}">
-                <a16:creationId xmlns="" xmlns:a16="http://schemas.microsoft.com/office/drawing/2014/main" id="{2EF7B1F2-BB5A-44D0-816D-16AD2C71430E}"/>
+                <a16:creationId xmlns:a16="http://schemas.microsoft.com/office/drawing/2014/main" xmlns="" id="{2EF7B1F2-BB5A-44D0-816D-16AD2C71430E}"/>
               </a:ext>
             </a:extLst>
           </p:cNvPr>
@@ -8785,7 +8785,7 @@
           <a:p>
             <a:fld id="{63289F7E-B80B-496E-81B4-D396C37C9454}" type="datetimeFigureOut">
               <a:rPr lang="pt-BR" smtClean="0"/>
-              <a:t>21/02/2026</a:t>
+              <a:t>28/02/2026</a:t>
             </a:fld>
             <a:endParaRPr lang="pt-BR"/>
           </a:p>
@@ -8796,7 +8796,7 @@
           <p:cNvPr id="5" name="Espaço Reservado para Rodapé 4">
             <a:extLst>
               <a:ext uri="{FF2B5EF4-FFF2-40B4-BE49-F238E27FC236}">
-                <a16:creationId xmlns="" xmlns:a16="http://schemas.microsoft.com/office/drawing/2014/main" id="{C703F94C-2CC8-4DAA-BC35-14FC3E841DCD}"/>
+                <a16:creationId xmlns:a16="http://schemas.microsoft.com/office/drawing/2014/main" xmlns="" id="{C703F94C-2CC8-4DAA-BC35-14FC3E841DCD}"/>
               </a:ext>
             </a:extLst>
           </p:cNvPr>
@@ -8839,7 +8839,7 @@
           <p:cNvPr id="6" name="Espaço Reservado para Número de Slide 5">
             <a:extLst>
               <a:ext uri="{FF2B5EF4-FFF2-40B4-BE49-F238E27FC236}">
-                <a16:creationId xmlns="" xmlns:a16="http://schemas.microsoft.com/office/drawing/2014/main" id="{64051336-7048-457A-8B61-D94291D71648}"/>
+                <a16:creationId xmlns:a16="http://schemas.microsoft.com/office/drawing/2014/main" xmlns="" id="{64051336-7048-457A-8B61-D94291D71648}"/>
               </a:ext>
             </a:extLst>
           </p:cNvPr>
@@ -9207,7 +9207,7 @@
           <p:cNvPr id="2" name="Título 1">
             <a:extLst>
               <a:ext uri="{FF2B5EF4-FFF2-40B4-BE49-F238E27FC236}">
-                <a16:creationId xmlns="" xmlns:a16="http://schemas.microsoft.com/office/drawing/2014/main" id="{32666AC8-2E17-4DB4-B0F5-60C640CCFD2E}"/>
+                <a16:creationId xmlns:a16="http://schemas.microsoft.com/office/drawing/2014/main" xmlns="" id="{32666AC8-2E17-4DB4-B0F5-60C640CCFD2E}"/>
               </a:ext>
             </a:extLst>
           </p:cNvPr>
@@ -9253,7 +9253,7 @@
           <p:cNvPr id="4" name="CaixaDeTexto 3">
             <a:extLst>
               <a:ext uri="{FF2B5EF4-FFF2-40B4-BE49-F238E27FC236}">
-                <a16:creationId xmlns="" xmlns:a16="http://schemas.microsoft.com/office/drawing/2014/main" id="{430EB894-B7D4-434C-9D1A-A14094D9BEEC}"/>
+                <a16:creationId xmlns:a16="http://schemas.microsoft.com/office/drawing/2014/main" xmlns="" id="{430EB894-B7D4-434C-9D1A-A14094D9BEEC}"/>
               </a:ext>
             </a:extLst>
           </p:cNvPr>
@@ -9294,7 +9294,7 @@
           <p:cNvPr id="1026" name="Picture 2" descr="Logo">
             <a:extLst>
               <a:ext uri="{FF2B5EF4-FFF2-40B4-BE49-F238E27FC236}">
-                <a16:creationId xmlns="" xmlns:a16="http://schemas.microsoft.com/office/drawing/2014/main" id="{3F2642E0-4F6A-4196-8F58-E77D36E9A33F}"/>
+                <a16:creationId xmlns:a16="http://schemas.microsoft.com/office/drawing/2014/main" xmlns="" id="{3F2642E0-4F6A-4196-8F58-E77D36E9A33F}"/>
               </a:ext>
             </a:extLst>
           </p:cNvPr>
@@ -9339,7 +9339,7 @@
           <p:cNvPr id="5122" name="Picture 2" descr="Image result for machine learning">
             <a:extLst>
               <a:ext uri="{FF2B5EF4-FFF2-40B4-BE49-F238E27FC236}">
-                <a16:creationId xmlns="" xmlns:a16="http://schemas.microsoft.com/office/drawing/2014/main" id="{810CE0A2-4102-44A6-A370-175E7896CDCB}"/>
+                <a16:creationId xmlns:a16="http://schemas.microsoft.com/office/drawing/2014/main" xmlns="" id="{810CE0A2-4102-44A6-A370-175E7896CDCB}"/>
               </a:ext>
             </a:extLst>
           </p:cNvPr>
@@ -9414,7 +9414,7 @@
           <p:cNvPr id="2" name="Título 1">
             <a:extLst>
               <a:ext uri="{FF2B5EF4-FFF2-40B4-BE49-F238E27FC236}">
-                <a16:creationId xmlns="" xmlns:a16="http://schemas.microsoft.com/office/drawing/2014/main" id="{B2DF1BE3-A387-1199-902E-AC1680BF9682}"/>
+                <a16:creationId xmlns:a16="http://schemas.microsoft.com/office/drawing/2014/main" xmlns="" id="{B2DF1BE3-A387-1199-902E-AC1680BF9682}"/>
               </a:ext>
             </a:extLst>
           </p:cNvPr>
@@ -9444,7 +9444,7 @@
               <p:cNvPr id="3" name="Espaço Reservado para Conteúdo 2">
                 <a:extLst>
                   <a:ext uri="{FF2B5EF4-FFF2-40B4-BE49-F238E27FC236}">
-                    <a16:creationId xmlns="" xmlns:a16="http://schemas.microsoft.com/office/drawing/2014/main" id="{D4A261E2-EE7B-ABC6-0440-76C231BADC90}"/>
+                    <a16:creationId xmlns:a16="http://schemas.microsoft.com/office/drawing/2014/main" xmlns="" id="{D4A261E2-EE7B-ABC6-0440-76C231BADC90}"/>
                   </a:ext>
                 </a:extLst>
               </p:cNvPr>
@@ -9835,7 +9835,7 @@
           <p:cNvPr id="6" name="TextBox 19">
             <a:extLst>
               <a:ext uri="{FF2B5EF4-FFF2-40B4-BE49-F238E27FC236}">
-                <a16:creationId xmlns="" xmlns:a16="http://schemas.microsoft.com/office/drawing/2014/main" id="{A1BBAE81-E3A1-6786-5F92-A8B1850689D9}"/>
+                <a16:creationId xmlns:a16="http://schemas.microsoft.com/office/drawing/2014/main" xmlns="" id="{A1BBAE81-E3A1-6786-5F92-A8B1850689D9}"/>
               </a:ext>
             </a:extLst>
           </p:cNvPr>
@@ -9883,7 +9883,7 @@
           <p:cNvPr id="7" name="Straight Arrow Connector 24">
             <a:extLst>
               <a:ext uri="{FF2B5EF4-FFF2-40B4-BE49-F238E27FC236}">
-                <a16:creationId xmlns="" xmlns:a16="http://schemas.microsoft.com/office/drawing/2014/main" id="{C023577F-3BE8-777C-02F7-B6D4BA12EE9C}"/>
+                <a16:creationId xmlns:a16="http://schemas.microsoft.com/office/drawing/2014/main" xmlns="" id="{C023577F-3BE8-777C-02F7-B6D4BA12EE9C}"/>
               </a:ext>
             </a:extLst>
           </p:cNvPr>
@@ -9927,7 +9927,7 @@
           <p:cNvPr id="16" name="Agrupar 15">
             <a:extLst>
               <a:ext uri="{FF2B5EF4-FFF2-40B4-BE49-F238E27FC236}">
-                <a16:creationId xmlns="" xmlns:a16="http://schemas.microsoft.com/office/drawing/2014/main" id="{E1BC3B28-A877-B1F8-8724-FEC92B3B8AB1}"/>
+                <a16:creationId xmlns:a16="http://schemas.microsoft.com/office/drawing/2014/main" xmlns="" id="{E1BC3B28-A877-B1F8-8724-FEC92B3B8AB1}"/>
               </a:ext>
             </a:extLst>
           </p:cNvPr>
@@ -9947,7 +9947,7 @@
             <p:cNvPr id="4" name="Picture 16">
               <a:extLst>
                 <a:ext uri="{FF2B5EF4-FFF2-40B4-BE49-F238E27FC236}">
-                  <a16:creationId xmlns="" xmlns:a16="http://schemas.microsoft.com/office/drawing/2014/main" id="{7F40541D-F948-44BC-4E48-39EBFFB9640C}"/>
+                  <a16:creationId xmlns:a16="http://schemas.microsoft.com/office/drawing/2014/main" xmlns="" id="{7F40541D-F948-44BC-4E48-39EBFFB9640C}"/>
                 </a:ext>
               </a:extLst>
             </p:cNvPr>
@@ -9976,7 +9976,7 @@
             <p:cNvPr id="5" name="Rectangle 17">
               <a:extLst>
                 <a:ext uri="{FF2B5EF4-FFF2-40B4-BE49-F238E27FC236}">
-                  <a16:creationId xmlns="" xmlns:a16="http://schemas.microsoft.com/office/drawing/2014/main" id="{11D202E4-A9E4-6400-B6B5-08509661CB6A}"/>
+                  <a16:creationId xmlns:a16="http://schemas.microsoft.com/office/drawing/2014/main" xmlns="" id="{11D202E4-A9E4-6400-B6B5-08509661CB6A}"/>
                 </a:ext>
               </a:extLst>
             </p:cNvPr>
@@ -10013,7 +10013,7 @@
                 <p:cNvPr id="13" name="CaixaDeTexto 12">
                   <a:extLst>
                     <a:ext uri="{FF2B5EF4-FFF2-40B4-BE49-F238E27FC236}">
-                      <a16:creationId xmlns="" xmlns:a16="http://schemas.microsoft.com/office/drawing/2014/main" id="{618FA8DE-2726-6E85-B79D-64F78B73160C}"/>
+                      <a16:creationId xmlns:a16="http://schemas.microsoft.com/office/drawing/2014/main" xmlns="" id="{618FA8DE-2726-6E85-B79D-64F78B73160C}"/>
                     </a:ext>
                   </a:extLst>
                 </p:cNvPr>
@@ -10129,7 +10129,7 @@
                 <p:cNvPr id="15" name="CaixaDeTexto 14">
                   <a:extLst>
                     <a:ext uri="{FF2B5EF4-FFF2-40B4-BE49-F238E27FC236}">
-                      <a16:creationId xmlns="" xmlns:a16="http://schemas.microsoft.com/office/drawing/2014/main" id="{5C2FEE03-FCD1-7E66-0281-BFC9FB634050}"/>
+                      <a16:creationId xmlns:a16="http://schemas.microsoft.com/office/drawing/2014/main" xmlns="" id="{5C2FEE03-FCD1-7E66-0281-BFC9FB634050}"/>
                     </a:ext>
                   </a:extLst>
                 </p:cNvPr>
@@ -10492,7 +10492,7 @@
           <p:cNvPr id="4" name="Agrupar 3">
             <a:extLst>
               <a:ext uri="{FF2B5EF4-FFF2-40B4-BE49-F238E27FC236}">
-                <a16:creationId xmlns="" xmlns:a16="http://schemas.microsoft.com/office/drawing/2014/main" id="{9167699E-C148-E6E4-AA25-95745C8A9E72}"/>
+                <a16:creationId xmlns:a16="http://schemas.microsoft.com/office/drawing/2014/main" xmlns="" id="{9167699E-C148-E6E4-AA25-95745C8A9E72}"/>
               </a:ext>
             </a:extLst>
           </p:cNvPr>
@@ -10512,7 +10512,7 @@
             <p:cNvPr id="6" name="Picture 16">
               <a:extLst>
                 <a:ext uri="{FF2B5EF4-FFF2-40B4-BE49-F238E27FC236}">
-                  <a16:creationId xmlns="" xmlns:a16="http://schemas.microsoft.com/office/drawing/2014/main" id="{43A50A77-EC5B-72A7-708D-F766435B42BA}"/>
+                  <a16:creationId xmlns:a16="http://schemas.microsoft.com/office/drawing/2014/main" xmlns="" id="{43A50A77-EC5B-72A7-708D-F766435B42BA}"/>
                 </a:ext>
               </a:extLst>
             </p:cNvPr>
@@ -10541,7 +10541,7 @@
             <p:cNvPr id="7" name="Rectangle 17">
               <a:extLst>
                 <a:ext uri="{FF2B5EF4-FFF2-40B4-BE49-F238E27FC236}">
-                  <a16:creationId xmlns="" xmlns:a16="http://schemas.microsoft.com/office/drawing/2014/main" id="{78B0EA9B-5D67-2FF5-DDBD-1D93340B6BAD}"/>
+                  <a16:creationId xmlns:a16="http://schemas.microsoft.com/office/drawing/2014/main" xmlns="" id="{78B0EA9B-5D67-2FF5-DDBD-1D93340B6BAD}"/>
                 </a:ext>
               </a:extLst>
             </p:cNvPr>
@@ -10578,7 +10578,7 @@
                 <p:cNvPr id="8" name="CaixaDeTexto 7">
                   <a:extLst>
                     <a:ext uri="{FF2B5EF4-FFF2-40B4-BE49-F238E27FC236}">
-                      <a16:creationId xmlns="" xmlns:a16="http://schemas.microsoft.com/office/drawing/2014/main" id="{AF29DA71-4710-10E0-14BD-1B1438F22A8F}"/>
+                      <a16:creationId xmlns:a16="http://schemas.microsoft.com/office/drawing/2014/main" xmlns="" id="{AF29DA71-4710-10E0-14BD-1B1438F22A8F}"/>
                     </a:ext>
                   </a:extLst>
                 </p:cNvPr>
@@ -10694,7 +10694,7 @@
                 <p:cNvPr id="9" name="CaixaDeTexto 8">
                   <a:extLst>
                     <a:ext uri="{FF2B5EF4-FFF2-40B4-BE49-F238E27FC236}">
-                      <a16:creationId xmlns="" xmlns:a16="http://schemas.microsoft.com/office/drawing/2014/main" id="{60F2DECC-8C19-18FE-B4F8-959EE96B8D82}"/>
+                      <a16:creationId xmlns:a16="http://schemas.microsoft.com/office/drawing/2014/main" xmlns="" id="{60F2DECC-8C19-18FE-B4F8-959EE96B8D82}"/>
                     </a:ext>
                   </a:extLst>
                 </p:cNvPr>
@@ -11010,7 +11010,7 @@
           <p:cNvPr id="4" name="Agrupar 3">
             <a:extLst>
               <a:ext uri="{FF2B5EF4-FFF2-40B4-BE49-F238E27FC236}">
-                <a16:creationId xmlns="" xmlns:a16="http://schemas.microsoft.com/office/drawing/2014/main" id="{9167699E-C148-E6E4-AA25-95745C8A9E72}"/>
+                <a16:creationId xmlns:a16="http://schemas.microsoft.com/office/drawing/2014/main" xmlns="" id="{9167699E-C148-E6E4-AA25-95745C8A9E72}"/>
               </a:ext>
             </a:extLst>
           </p:cNvPr>
@@ -11030,7 +11030,7 @@
             <p:cNvPr id="6" name="Picture 16">
               <a:extLst>
                 <a:ext uri="{FF2B5EF4-FFF2-40B4-BE49-F238E27FC236}">
-                  <a16:creationId xmlns="" xmlns:a16="http://schemas.microsoft.com/office/drawing/2014/main" id="{43A50A77-EC5B-72A7-708D-F766435B42BA}"/>
+                  <a16:creationId xmlns:a16="http://schemas.microsoft.com/office/drawing/2014/main" xmlns="" id="{43A50A77-EC5B-72A7-708D-F766435B42BA}"/>
                 </a:ext>
               </a:extLst>
             </p:cNvPr>
@@ -11059,7 +11059,7 @@
             <p:cNvPr id="7" name="Rectangle 17">
               <a:extLst>
                 <a:ext uri="{FF2B5EF4-FFF2-40B4-BE49-F238E27FC236}">
-                  <a16:creationId xmlns="" xmlns:a16="http://schemas.microsoft.com/office/drawing/2014/main" id="{78B0EA9B-5D67-2FF5-DDBD-1D93340B6BAD}"/>
+                  <a16:creationId xmlns:a16="http://schemas.microsoft.com/office/drawing/2014/main" xmlns="" id="{78B0EA9B-5D67-2FF5-DDBD-1D93340B6BAD}"/>
                 </a:ext>
               </a:extLst>
             </p:cNvPr>
@@ -11096,7 +11096,7 @@
                 <p:cNvPr id="8" name="CaixaDeTexto 7">
                   <a:extLst>
                     <a:ext uri="{FF2B5EF4-FFF2-40B4-BE49-F238E27FC236}">
-                      <a16:creationId xmlns="" xmlns:a16="http://schemas.microsoft.com/office/drawing/2014/main" id="{AF29DA71-4710-10E0-14BD-1B1438F22A8F}"/>
+                      <a16:creationId xmlns:a16="http://schemas.microsoft.com/office/drawing/2014/main" xmlns="" id="{AF29DA71-4710-10E0-14BD-1B1438F22A8F}"/>
                     </a:ext>
                   </a:extLst>
                 </p:cNvPr>
@@ -11212,7 +11212,7 @@
                 <p:cNvPr id="9" name="CaixaDeTexto 8">
                   <a:extLst>
                     <a:ext uri="{FF2B5EF4-FFF2-40B4-BE49-F238E27FC236}">
-                      <a16:creationId xmlns="" xmlns:a16="http://schemas.microsoft.com/office/drawing/2014/main" id="{60F2DECC-8C19-18FE-B4F8-959EE96B8D82}"/>
+                      <a16:creationId xmlns:a16="http://schemas.microsoft.com/office/drawing/2014/main" xmlns="" id="{60F2DECC-8C19-18FE-B4F8-959EE96B8D82}"/>
                     </a:ext>
                   </a:extLst>
                 </p:cNvPr>
@@ -11585,7 +11585,7 @@
           <p:cNvPr id="4" name="Agrupar 3">
             <a:extLst>
               <a:ext uri="{FF2B5EF4-FFF2-40B4-BE49-F238E27FC236}">
-                <a16:creationId xmlns="" xmlns:a16="http://schemas.microsoft.com/office/drawing/2014/main" id="{9167699E-C148-E6E4-AA25-95745C8A9E72}"/>
+                <a16:creationId xmlns:a16="http://schemas.microsoft.com/office/drawing/2014/main" xmlns="" id="{9167699E-C148-E6E4-AA25-95745C8A9E72}"/>
               </a:ext>
             </a:extLst>
           </p:cNvPr>
@@ -11605,7 +11605,7 @@
             <p:cNvPr id="6" name="Picture 16">
               <a:extLst>
                 <a:ext uri="{FF2B5EF4-FFF2-40B4-BE49-F238E27FC236}">
-                  <a16:creationId xmlns="" xmlns:a16="http://schemas.microsoft.com/office/drawing/2014/main" id="{43A50A77-EC5B-72A7-708D-F766435B42BA}"/>
+                  <a16:creationId xmlns:a16="http://schemas.microsoft.com/office/drawing/2014/main" xmlns="" id="{43A50A77-EC5B-72A7-708D-F766435B42BA}"/>
                 </a:ext>
               </a:extLst>
             </p:cNvPr>
@@ -11634,7 +11634,7 @@
             <p:cNvPr id="7" name="Rectangle 17">
               <a:extLst>
                 <a:ext uri="{FF2B5EF4-FFF2-40B4-BE49-F238E27FC236}">
-                  <a16:creationId xmlns="" xmlns:a16="http://schemas.microsoft.com/office/drawing/2014/main" id="{78B0EA9B-5D67-2FF5-DDBD-1D93340B6BAD}"/>
+                  <a16:creationId xmlns:a16="http://schemas.microsoft.com/office/drawing/2014/main" xmlns="" id="{78B0EA9B-5D67-2FF5-DDBD-1D93340B6BAD}"/>
                 </a:ext>
               </a:extLst>
             </p:cNvPr>
@@ -11671,7 +11671,7 @@
                 <p:cNvPr id="8" name="CaixaDeTexto 7">
                   <a:extLst>
                     <a:ext uri="{FF2B5EF4-FFF2-40B4-BE49-F238E27FC236}">
-                      <a16:creationId xmlns="" xmlns:a16="http://schemas.microsoft.com/office/drawing/2014/main" id="{AF29DA71-4710-10E0-14BD-1B1438F22A8F}"/>
+                      <a16:creationId xmlns:a16="http://schemas.microsoft.com/office/drawing/2014/main" xmlns="" id="{AF29DA71-4710-10E0-14BD-1B1438F22A8F}"/>
                     </a:ext>
                   </a:extLst>
                 </p:cNvPr>
@@ -11787,7 +11787,7 @@
                 <p:cNvPr id="9" name="CaixaDeTexto 8">
                   <a:extLst>
                     <a:ext uri="{FF2B5EF4-FFF2-40B4-BE49-F238E27FC236}">
-                      <a16:creationId xmlns="" xmlns:a16="http://schemas.microsoft.com/office/drawing/2014/main" id="{60F2DECC-8C19-18FE-B4F8-959EE96B8D82}"/>
+                      <a16:creationId xmlns:a16="http://schemas.microsoft.com/office/drawing/2014/main" xmlns="" id="{60F2DECC-8C19-18FE-B4F8-959EE96B8D82}"/>
                     </a:ext>
                   </a:extLst>
                 </p:cNvPr>
@@ -12031,7 +12031,7 @@
           <p:cNvPr id="4" name="Agrupar 3">
             <a:extLst>
               <a:ext uri="{FF2B5EF4-FFF2-40B4-BE49-F238E27FC236}">
-                <a16:creationId xmlns="" xmlns:a16="http://schemas.microsoft.com/office/drawing/2014/main" id="{9167699E-C148-E6E4-AA25-95745C8A9E72}"/>
+                <a16:creationId xmlns:a16="http://schemas.microsoft.com/office/drawing/2014/main" xmlns="" id="{9167699E-C148-E6E4-AA25-95745C8A9E72}"/>
               </a:ext>
             </a:extLst>
           </p:cNvPr>
@@ -12051,7 +12051,7 @@
             <p:cNvPr id="6" name="Picture 16">
               <a:extLst>
                 <a:ext uri="{FF2B5EF4-FFF2-40B4-BE49-F238E27FC236}">
-                  <a16:creationId xmlns="" xmlns:a16="http://schemas.microsoft.com/office/drawing/2014/main" id="{43A50A77-EC5B-72A7-708D-F766435B42BA}"/>
+                  <a16:creationId xmlns:a16="http://schemas.microsoft.com/office/drawing/2014/main" xmlns="" id="{43A50A77-EC5B-72A7-708D-F766435B42BA}"/>
                 </a:ext>
               </a:extLst>
             </p:cNvPr>
@@ -12080,7 +12080,7 @@
             <p:cNvPr id="7" name="Rectangle 17">
               <a:extLst>
                 <a:ext uri="{FF2B5EF4-FFF2-40B4-BE49-F238E27FC236}">
-                  <a16:creationId xmlns="" xmlns:a16="http://schemas.microsoft.com/office/drawing/2014/main" id="{78B0EA9B-5D67-2FF5-DDBD-1D93340B6BAD}"/>
+                  <a16:creationId xmlns:a16="http://schemas.microsoft.com/office/drawing/2014/main" xmlns="" id="{78B0EA9B-5D67-2FF5-DDBD-1D93340B6BAD}"/>
                 </a:ext>
               </a:extLst>
             </p:cNvPr>
@@ -12117,7 +12117,7 @@
                 <p:cNvPr id="8" name="CaixaDeTexto 7">
                   <a:extLst>
                     <a:ext uri="{FF2B5EF4-FFF2-40B4-BE49-F238E27FC236}">
-                      <a16:creationId xmlns="" xmlns:a16="http://schemas.microsoft.com/office/drawing/2014/main" id="{AF29DA71-4710-10E0-14BD-1B1438F22A8F}"/>
+                      <a16:creationId xmlns:a16="http://schemas.microsoft.com/office/drawing/2014/main" xmlns="" id="{AF29DA71-4710-10E0-14BD-1B1438F22A8F}"/>
                     </a:ext>
                   </a:extLst>
                 </p:cNvPr>
@@ -12233,7 +12233,7 @@
                 <p:cNvPr id="9" name="CaixaDeTexto 8">
                   <a:extLst>
                     <a:ext uri="{FF2B5EF4-FFF2-40B4-BE49-F238E27FC236}">
-                      <a16:creationId xmlns="" xmlns:a16="http://schemas.microsoft.com/office/drawing/2014/main" id="{60F2DECC-8C19-18FE-B4F8-959EE96B8D82}"/>
+                      <a16:creationId xmlns:a16="http://schemas.microsoft.com/office/drawing/2014/main" xmlns="" id="{60F2DECC-8C19-18FE-B4F8-959EE96B8D82}"/>
                     </a:ext>
                   </a:extLst>
                 </p:cNvPr>
@@ -12395,7 +12395,7 @@
           <p:cNvPr id="2" name="Título 1">
             <a:extLst>
               <a:ext uri="{FF2B5EF4-FFF2-40B4-BE49-F238E27FC236}">
-                <a16:creationId xmlns="" xmlns:a16="http://schemas.microsoft.com/office/drawing/2014/main" id="{0701249B-8A42-478D-8165-DC55BCBE9F30}"/>
+                <a16:creationId xmlns:a16="http://schemas.microsoft.com/office/drawing/2014/main" xmlns="" id="{0701249B-8A42-478D-8165-DC55BCBE9F30}"/>
               </a:ext>
             </a:extLst>
           </p:cNvPr>
@@ -12418,14 +12418,14 @@
           </a:p>
         </p:txBody>
       </p:sp>
-      <mc:AlternateContent xmlns:mc="http://schemas.openxmlformats.org/markup-compatibility/2006" xmlns:a14="http://schemas.microsoft.com/office/drawing/2010/main">
-        <mc:Choice Requires="a14">
+      <mc:AlternateContent xmlns:mc="http://schemas.openxmlformats.org/markup-compatibility/2006">
+        <mc:Choice xmlns:a14="http://schemas.microsoft.com/office/drawing/2010/main" Requires="a14">
           <p:sp>
             <p:nvSpPr>
               <p:cNvPr id="3" name="Espaço Reservado para Conteúdo 2">
                 <a:extLst>
                   <a:ext uri="{FF2B5EF4-FFF2-40B4-BE49-F238E27FC236}">
-                    <a16:creationId xmlns="" xmlns:a16="http://schemas.microsoft.com/office/drawing/2014/main" id="{0DF9D294-ED00-CA9B-F674-FE09977FC471}"/>
+                    <a16:creationId xmlns:a16="http://schemas.microsoft.com/office/drawing/2014/main" xmlns="" id="{0DF9D294-ED00-CA9B-F674-FE09977FC471}"/>
                   </a:ext>
                 </a:extLst>
               </p:cNvPr>
@@ -12755,7 +12755,11 @@
                 </a14:m>
                 <a:r>
                   <a:rPr lang="pt-BR" dirty="0"/>
-                  <a:t>é o passo de aprendizagem, o qual </a:t>
+                  <a:t>é o passo de aprendizagem, o </a:t>
+                </a:r>
+                <a:r>
+                  <a:rPr lang="pt-BR" dirty="0" smtClean="0"/>
+                  <a:t>qual </a:t>
                 </a:r>
                 <a:r>
                   <a:rPr lang="pt-BR" dirty="0" smtClean="0"/>
@@ -12804,13 +12808,13 @@
             </p:txBody>
           </p:sp>
         </mc:Choice>
-        <mc:Fallback xmlns="">
+        <mc:Fallback>
           <p:sp>
             <p:nvSpPr>
               <p:cNvPr id="3" name="Espaço Reservado para Conteúdo 2">
                 <a:extLst>
                   <a:ext uri="{FF2B5EF4-FFF2-40B4-BE49-F238E27FC236}">
-                    <a16:creationId xmlns="" xmlns:a16="http://schemas.microsoft.com/office/drawing/2014/main" xmlns:a14="http://schemas.microsoft.com/office/drawing/2010/main" id="{0DF9D294-ED00-CA9B-F674-FE09977FC471}"/>
+                    <a16:creationId xmlns:a16="http://schemas.microsoft.com/office/drawing/2014/main" xmlns="" xmlns:a14="http://schemas.microsoft.com/office/drawing/2010/main" id="{0DF9D294-ED00-CA9B-F674-FE09977FC471}"/>
                   </a:ext>
                 </a:extLst>
               </p:cNvPr>
@@ -12883,7 +12887,7 @@
           <p:cNvPr id="2" name="Título 1">
             <a:extLst>
               <a:ext uri="{FF2B5EF4-FFF2-40B4-BE49-F238E27FC236}">
-                <a16:creationId xmlns="" xmlns:a16="http://schemas.microsoft.com/office/drawing/2014/main" id="{E8F62A90-2205-3D44-64BD-FF7C92AAABA5}"/>
+                <a16:creationId xmlns:a16="http://schemas.microsoft.com/office/drawing/2014/main" xmlns="" id="{E8F62A90-2205-3D44-64BD-FF7C92AAABA5}"/>
               </a:ext>
             </a:extLst>
           </p:cNvPr>
@@ -12913,7 +12917,7 @@
               <p:cNvPr id="3" name="Espaço Reservado para Conteúdo 2">
                 <a:extLst>
                   <a:ext uri="{FF2B5EF4-FFF2-40B4-BE49-F238E27FC236}">
-                    <a16:creationId xmlns="" xmlns:a16="http://schemas.microsoft.com/office/drawing/2014/main" id="{E09D0142-9D48-0627-42F7-9D56F2FF14AA}"/>
+                    <a16:creationId xmlns:a16="http://schemas.microsoft.com/office/drawing/2014/main" xmlns="" id="{E09D0142-9D48-0627-42F7-9D56F2FF14AA}"/>
                   </a:ext>
                 </a:extLst>
               </p:cNvPr>
@@ -13973,7 +13977,7 @@
           <p:cNvPr id="5" name="Agrupar 4">
             <a:extLst>
               <a:ext uri="{FF2B5EF4-FFF2-40B4-BE49-F238E27FC236}">
-                <a16:creationId xmlns="" xmlns:a16="http://schemas.microsoft.com/office/drawing/2014/main" id="{97BB793F-626C-032F-D789-595B3EF8990B}"/>
+                <a16:creationId xmlns:a16="http://schemas.microsoft.com/office/drawing/2014/main" xmlns="" id="{97BB793F-626C-032F-D789-595B3EF8990B}"/>
               </a:ext>
             </a:extLst>
           </p:cNvPr>
@@ -13993,7 +13997,7 @@
             <p:cNvPr id="6" name="Picture 16">
               <a:extLst>
                 <a:ext uri="{FF2B5EF4-FFF2-40B4-BE49-F238E27FC236}">
-                  <a16:creationId xmlns="" xmlns:a16="http://schemas.microsoft.com/office/drawing/2014/main" id="{ECF46F2F-920A-D968-C9C5-DE00D504373A}"/>
+                  <a16:creationId xmlns:a16="http://schemas.microsoft.com/office/drawing/2014/main" xmlns="" id="{ECF46F2F-920A-D968-C9C5-DE00D504373A}"/>
                 </a:ext>
               </a:extLst>
             </p:cNvPr>
@@ -14022,7 +14026,7 @@
             <p:cNvPr id="7" name="Rectangle 17">
               <a:extLst>
                 <a:ext uri="{FF2B5EF4-FFF2-40B4-BE49-F238E27FC236}">
-                  <a16:creationId xmlns="" xmlns:a16="http://schemas.microsoft.com/office/drawing/2014/main" id="{98EA6FC8-71BF-A9FA-24DA-9D7635294C6D}"/>
+                  <a16:creationId xmlns:a16="http://schemas.microsoft.com/office/drawing/2014/main" xmlns="" id="{98EA6FC8-71BF-A9FA-24DA-9D7635294C6D}"/>
                 </a:ext>
               </a:extLst>
             </p:cNvPr>
@@ -14059,7 +14063,7 @@
                 <p:cNvPr id="8" name="CaixaDeTexto 7">
                   <a:extLst>
                     <a:ext uri="{FF2B5EF4-FFF2-40B4-BE49-F238E27FC236}">
-                      <a16:creationId xmlns="" xmlns:a16="http://schemas.microsoft.com/office/drawing/2014/main" id="{BEC0682A-BB30-36D9-07EA-F237D1A563B3}"/>
+                      <a16:creationId xmlns:a16="http://schemas.microsoft.com/office/drawing/2014/main" xmlns="" id="{BEC0682A-BB30-36D9-07EA-F237D1A563B3}"/>
                     </a:ext>
                   </a:extLst>
                 </p:cNvPr>
@@ -14175,7 +14179,7 @@
                 <p:cNvPr id="9" name="CaixaDeTexto 8">
                   <a:extLst>
                     <a:ext uri="{FF2B5EF4-FFF2-40B4-BE49-F238E27FC236}">
-                      <a16:creationId xmlns="" xmlns:a16="http://schemas.microsoft.com/office/drawing/2014/main" id="{F8F08279-945E-08E1-766E-F06EF5760BC1}"/>
+                      <a16:creationId xmlns:a16="http://schemas.microsoft.com/office/drawing/2014/main" xmlns="" id="{F8F08279-945E-08E1-766E-F06EF5760BC1}"/>
                     </a:ext>
                   </a:extLst>
                 </p:cNvPr>
@@ -15369,7 +15373,7 @@
           <p:cNvPr id="5" name="Agrupar 4">
             <a:extLst>
               <a:ext uri="{FF2B5EF4-FFF2-40B4-BE49-F238E27FC236}">
-                <a16:creationId xmlns="" xmlns:a16="http://schemas.microsoft.com/office/drawing/2014/main" id="{97BB793F-626C-032F-D789-595B3EF8990B}"/>
+                <a16:creationId xmlns:a16="http://schemas.microsoft.com/office/drawing/2014/main" xmlns="" id="{97BB793F-626C-032F-D789-595B3EF8990B}"/>
               </a:ext>
             </a:extLst>
           </p:cNvPr>
@@ -15389,7 +15393,7 @@
             <p:cNvPr id="6" name="Picture 16">
               <a:extLst>
                 <a:ext uri="{FF2B5EF4-FFF2-40B4-BE49-F238E27FC236}">
-                  <a16:creationId xmlns="" xmlns:a16="http://schemas.microsoft.com/office/drawing/2014/main" id="{ECF46F2F-920A-D968-C9C5-DE00D504373A}"/>
+                  <a16:creationId xmlns:a16="http://schemas.microsoft.com/office/drawing/2014/main" xmlns="" id="{ECF46F2F-920A-D968-C9C5-DE00D504373A}"/>
                 </a:ext>
               </a:extLst>
             </p:cNvPr>
@@ -15418,7 +15422,7 @@
             <p:cNvPr id="7" name="Rectangle 17">
               <a:extLst>
                 <a:ext uri="{FF2B5EF4-FFF2-40B4-BE49-F238E27FC236}">
-                  <a16:creationId xmlns="" xmlns:a16="http://schemas.microsoft.com/office/drawing/2014/main" id="{98EA6FC8-71BF-A9FA-24DA-9D7635294C6D}"/>
+                  <a16:creationId xmlns:a16="http://schemas.microsoft.com/office/drawing/2014/main" xmlns="" id="{98EA6FC8-71BF-A9FA-24DA-9D7635294C6D}"/>
                 </a:ext>
               </a:extLst>
             </p:cNvPr>
@@ -15455,7 +15459,7 @@
                 <p:cNvPr id="8" name="CaixaDeTexto 7">
                   <a:extLst>
                     <a:ext uri="{FF2B5EF4-FFF2-40B4-BE49-F238E27FC236}">
-                      <a16:creationId xmlns="" xmlns:a16="http://schemas.microsoft.com/office/drawing/2014/main" id="{BEC0682A-BB30-36D9-07EA-F237D1A563B3}"/>
+                      <a16:creationId xmlns:a16="http://schemas.microsoft.com/office/drawing/2014/main" xmlns="" id="{BEC0682A-BB30-36D9-07EA-F237D1A563B3}"/>
                     </a:ext>
                   </a:extLst>
                 </p:cNvPr>
@@ -15571,7 +15575,7 @@
                 <p:cNvPr id="9" name="CaixaDeTexto 8">
                   <a:extLst>
                     <a:ext uri="{FF2B5EF4-FFF2-40B4-BE49-F238E27FC236}">
-                      <a16:creationId xmlns="" xmlns:a16="http://schemas.microsoft.com/office/drawing/2014/main" id="{F8F08279-945E-08E1-766E-F06EF5760BC1}"/>
+                      <a16:creationId xmlns:a16="http://schemas.microsoft.com/office/drawing/2014/main" xmlns="" id="{F8F08279-945E-08E1-766E-F06EF5760BC1}"/>
                     </a:ext>
                   </a:extLst>
                 </p:cNvPr>
@@ -16776,7 +16780,7 @@
           <p:cNvPr id="5" name="Agrupar 4">
             <a:extLst>
               <a:ext uri="{FF2B5EF4-FFF2-40B4-BE49-F238E27FC236}">
-                <a16:creationId xmlns="" xmlns:a16="http://schemas.microsoft.com/office/drawing/2014/main" id="{97BB793F-626C-032F-D789-595B3EF8990B}"/>
+                <a16:creationId xmlns:a16="http://schemas.microsoft.com/office/drawing/2014/main" xmlns="" id="{97BB793F-626C-032F-D789-595B3EF8990B}"/>
               </a:ext>
             </a:extLst>
           </p:cNvPr>
@@ -16796,7 +16800,7 @@
             <p:cNvPr id="6" name="Picture 16">
               <a:extLst>
                 <a:ext uri="{FF2B5EF4-FFF2-40B4-BE49-F238E27FC236}">
-                  <a16:creationId xmlns="" xmlns:a16="http://schemas.microsoft.com/office/drawing/2014/main" id="{ECF46F2F-920A-D968-C9C5-DE00D504373A}"/>
+                  <a16:creationId xmlns:a16="http://schemas.microsoft.com/office/drawing/2014/main" xmlns="" id="{ECF46F2F-920A-D968-C9C5-DE00D504373A}"/>
                 </a:ext>
               </a:extLst>
             </p:cNvPr>
@@ -16825,7 +16829,7 @@
             <p:cNvPr id="7" name="Rectangle 17">
               <a:extLst>
                 <a:ext uri="{FF2B5EF4-FFF2-40B4-BE49-F238E27FC236}">
-                  <a16:creationId xmlns="" xmlns:a16="http://schemas.microsoft.com/office/drawing/2014/main" id="{98EA6FC8-71BF-A9FA-24DA-9D7635294C6D}"/>
+                  <a16:creationId xmlns:a16="http://schemas.microsoft.com/office/drawing/2014/main" xmlns="" id="{98EA6FC8-71BF-A9FA-24DA-9D7635294C6D}"/>
                 </a:ext>
               </a:extLst>
             </p:cNvPr>
@@ -16862,7 +16866,7 @@
                 <p:cNvPr id="8" name="CaixaDeTexto 7">
                   <a:extLst>
                     <a:ext uri="{FF2B5EF4-FFF2-40B4-BE49-F238E27FC236}">
-                      <a16:creationId xmlns="" xmlns:a16="http://schemas.microsoft.com/office/drawing/2014/main" id="{BEC0682A-BB30-36D9-07EA-F237D1A563B3}"/>
+                      <a16:creationId xmlns:a16="http://schemas.microsoft.com/office/drawing/2014/main" xmlns="" id="{BEC0682A-BB30-36D9-07EA-F237D1A563B3}"/>
                     </a:ext>
                   </a:extLst>
                 </p:cNvPr>
@@ -16978,7 +16982,7 @@
                 <p:cNvPr id="9" name="CaixaDeTexto 8">
                   <a:extLst>
                     <a:ext uri="{FF2B5EF4-FFF2-40B4-BE49-F238E27FC236}">
-                      <a16:creationId xmlns="" xmlns:a16="http://schemas.microsoft.com/office/drawing/2014/main" id="{F8F08279-945E-08E1-766E-F06EF5760BC1}"/>
+                      <a16:creationId xmlns:a16="http://schemas.microsoft.com/office/drawing/2014/main" xmlns="" id="{F8F08279-945E-08E1-766E-F06EF5760BC1}"/>
                     </a:ext>
                   </a:extLst>
                 </p:cNvPr>
@@ -17293,7 +17297,7 @@
           <p:cNvPr id="2" name="Título 1">
             <a:extLst>
               <a:ext uri="{FF2B5EF4-FFF2-40B4-BE49-F238E27FC236}">
-                <a16:creationId xmlns="" xmlns:a16="http://schemas.microsoft.com/office/drawing/2014/main" id="{6636B7CF-8113-56BB-B99E-8A161CD9B1EB}"/>
+                <a16:creationId xmlns:a16="http://schemas.microsoft.com/office/drawing/2014/main" xmlns="" id="{6636B7CF-8113-56BB-B99E-8A161CD9B1EB}"/>
               </a:ext>
             </a:extLst>
           </p:cNvPr>
@@ -17321,7 +17325,7 @@
           <p:cNvPr id="3" name="Espaço Reservado para Conteúdo 2">
             <a:extLst>
               <a:ext uri="{FF2B5EF4-FFF2-40B4-BE49-F238E27FC236}">
-                <a16:creationId xmlns="" xmlns:a16="http://schemas.microsoft.com/office/drawing/2014/main" id="{3A545FD3-C171-8153-940B-3CC27506941C}"/>
+                <a16:creationId xmlns:a16="http://schemas.microsoft.com/office/drawing/2014/main" xmlns="" id="{3A545FD3-C171-8153-940B-3CC27506941C}"/>
               </a:ext>
             </a:extLst>
           </p:cNvPr>
@@ -17392,7 +17396,15 @@
             </a:r>
             <a:r>
               <a:rPr lang="pt-BR" dirty="0"/>
-              <a:t>umas das outras, ou seja, não se sobrepõem.</a:t>
+              <a:t>umas das </a:t>
+            </a:r>
+            <a:r>
+              <a:rPr lang="pt-BR" dirty="0" smtClean="0"/>
+              <a:t>outras e, portanto, não </a:t>
+            </a:r>
+            <a:r>
+              <a:rPr lang="pt-BR" dirty="0"/>
+              <a:t>se sobrepõem.</a:t>
             </a:r>
           </a:p>
           <a:p>
@@ -17428,7 +17440,15 @@
             </a:pPr>
             <a:r>
               <a:rPr lang="pt-BR" dirty="0"/>
-              <a:t>Ou seja, não precisa ser um problema linearmente separável.</a:t>
+              <a:t>N</a:t>
+            </a:r>
+            <a:r>
+              <a:rPr lang="pt-BR" dirty="0" smtClean="0"/>
+              <a:t>ão </a:t>
+            </a:r>
+            <a:r>
+              <a:rPr lang="pt-BR" dirty="0"/>
+              <a:t>precisa ser um problema linearmente separável.</a:t>
             </a:r>
           </a:p>
           <a:p>
@@ -17446,7 +17466,19 @@
             </a:r>
             <a:r>
               <a:rPr lang="pt-BR" dirty="0"/>
-              <a:t>com erro de classificação igual a zero, ou seja, todos os exemplos são perfeitamente classificados.</a:t>
+              <a:t>com </a:t>
+            </a:r>
+            <a:r>
+              <a:rPr lang="pt-BR" b="1" i="1" dirty="0">
+                <a:solidFill>
+                  <a:srgbClr val="00B050"/>
+                </a:solidFill>
+              </a:rPr>
+              <a:t>erro de classificação igual a zero</a:t>
+            </a:r>
+            <a:r>
+              <a:rPr lang="pt-BR" dirty="0"/>
+              <a:t>, ou seja, todos os exemplos são perfeitamente classificados.</a:t>
             </a:r>
           </a:p>
           <a:p>
@@ -17462,7 +17494,7 @@
           <p:cNvPr id="5" name="Picture 3">
             <a:extLst>
               <a:ext uri="{FF2B5EF4-FFF2-40B4-BE49-F238E27FC236}">
-                <a16:creationId xmlns="" xmlns:a16="http://schemas.microsoft.com/office/drawing/2014/main" id="{54D0F914-40D4-E004-16D1-A0567AB22B09}"/>
+                <a16:creationId xmlns:a16="http://schemas.microsoft.com/office/drawing/2014/main" xmlns="" id="{54D0F914-40D4-E004-16D1-A0567AB22B09}"/>
               </a:ext>
             </a:extLst>
           </p:cNvPr>
@@ -17497,7 +17529,7 @@
           <p:cNvPr id="7" name="Imagem 6">
             <a:extLst>
               <a:ext uri="{FF2B5EF4-FFF2-40B4-BE49-F238E27FC236}">
-                <a16:creationId xmlns="" xmlns:a16="http://schemas.microsoft.com/office/drawing/2014/main" id="{D9C2A466-55C5-046B-2430-AC3551D26304}"/>
+                <a16:creationId xmlns:a16="http://schemas.microsoft.com/office/drawing/2014/main" xmlns="" id="{D9C2A466-55C5-046B-2430-AC3551D26304}"/>
               </a:ext>
             </a:extLst>
           </p:cNvPr>
@@ -17526,7 +17558,7 @@
           <p:cNvPr id="15" name="Imagem 14">
             <a:extLst>
               <a:ext uri="{FF2B5EF4-FFF2-40B4-BE49-F238E27FC236}">
-                <a16:creationId xmlns="" xmlns:a16="http://schemas.microsoft.com/office/drawing/2014/main" id="{39407819-FE6A-C2CA-4C72-A0623AD14F78}"/>
+                <a16:creationId xmlns:a16="http://schemas.microsoft.com/office/drawing/2014/main" xmlns="" id="{39407819-FE6A-C2CA-4C72-A0623AD14F78}"/>
               </a:ext>
             </a:extLst>
           </p:cNvPr>
@@ -17592,7 +17624,7 @@
           <p:cNvPr id="2" name="Título 1">
             <a:extLst>
               <a:ext uri="{FF2B5EF4-FFF2-40B4-BE49-F238E27FC236}">
-                <a16:creationId xmlns="" xmlns:a16="http://schemas.microsoft.com/office/drawing/2014/main" id="{CF9B30B4-0805-101B-C227-AD4405F0BA79}"/>
+                <a16:creationId xmlns:a16="http://schemas.microsoft.com/office/drawing/2014/main" xmlns="" id="{CF9B30B4-0805-101B-C227-AD4405F0BA79}"/>
               </a:ext>
             </a:extLst>
           </p:cNvPr>
@@ -17615,14 +17647,14 @@
           </a:p>
         </p:txBody>
       </p:sp>
-      <mc:AlternateContent xmlns:mc="http://schemas.openxmlformats.org/markup-compatibility/2006" xmlns:a14="http://schemas.microsoft.com/office/drawing/2010/main">
-        <mc:Choice Requires="a14">
+      <mc:AlternateContent xmlns:mc="http://schemas.openxmlformats.org/markup-compatibility/2006">
+        <mc:Choice xmlns:a14="http://schemas.microsoft.com/office/drawing/2010/main" Requires="a14">
           <p:sp>
             <p:nvSpPr>
               <p:cNvPr id="3" name="Espaço Reservado para Conteúdo 2">
                 <a:extLst>
                   <a:ext uri="{FF2B5EF4-FFF2-40B4-BE49-F238E27FC236}">
-                    <a16:creationId xmlns="" xmlns:a16="http://schemas.microsoft.com/office/drawing/2014/main" id="{1B95DA0B-9FB2-61FE-86F8-6A65C4F51978}"/>
+                    <a16:creationId xmlns:a16="http://schemas.microsoft.com/office/drawing/2014/main" xmlns="" id="{1B95DA0B-9FB2-61FE-86F8-6A65C4F51978}"/>
                   </a:ext>
                 </a:extLst>
               </p:cNvPr>
@@ -17660,28 +17692,28 @@
               </a:p>
               <a:p>
                 <a:r>
+                  <a:rPr lang="pt-BR" dirty="0" smtClean="0"/>
+                  <a:t>Não </a:t>
+                </a:r>
+                <a:r>
                   <a:rPr lang="pt-BR" dirty="0"/>
-                  <a:t>Nesse caso, a regra não converge para uma solução </a:t>
-                </a:r>
-                <a:r>
-                  <a:rPr lang="pt-BR" b="1" i="1" dirty="0">
-                    <a:solidFill>
-                      <a:srgbClr val="7030A0"/>
-                    </a:solidFill>
-                  </a:rPr>
-                  <a:t>estável</a:t>
+                  <a:t>há </a:t>
+                </a:r>
+                <a:r>
+                  <a:rPr lang="pt-BR" dirty="0" smtClean="0"/>
+                  <a:t>convergência, </a:t>
                 </a:r>
                 <a:r>
                   <a:rPr lang="pt-BR" dirty="0"/>
-                  <a:t> para </a:t>
-                </a:r>
-                <a:r>
-                  <a:rPr lang="pt-BR" b="1" i="1" dirty="0">
-                    <a:solidFill>
-                      <a:srgbClr val="00B050"/>
-                    </a:solidFill>
-                  </a:rPr>
-                  <a:t>valores </a:t>
+                  <a:t>pois </a:t>
+                </a:r>
+                <a:r>
+                  <a:rPr lang="pt-BR" dirty="0" smtClean="0"/>
+                  <a:t>os </a:t>
+                </a:r>
+                <a:r>
+                  <a:rPr lang="pt-BR" dirty="0" smtClean="0"/>
+                  <a:t>pesos são </a:t>
                 </a:r>
                 <a:r>
                   <a:rPr lang="pt-BR" b="1" i="1" dirty="0" smtClean="0">
@@ -17689,79 +17721,90 @@
                       <a:srgbClr val="00B050"/>
                     </a:solidFill>
                   </a:rPr>
-                  <a:t>constantes do </a:t>
-                </a:r>
-                <a:r>
-                  <a:rPr lang="pt-BR" b="1" i="1" dirty="0">
+                  <a:t>ajustados </a:t>
+                </a:r>
+                <a:r>
+                  <a:rPr lang="pt-BR" b="1" i="1" dirty="0" smtClean="0">
                     <a:solidFill>
                       <a:srgbClr val="00B050"/>
                     </a:solidFill>
                   </a:rPr>
-                  <a:t>passo de aprendizagem</a:t>
-                </a:r>
-                <a:r>
-                  <a:rPr lang="pt-BR" dirty="0"/>
-                  <a:t>, </a:t>
+                  <a:t>com uma </a:t>
+                </a:r>
+                <a:r>
+                  <a:rPr lang="pt-BR" b="1" i="1" dirty="0" smtClean="0">
+                    <a:solidFill>
+                      <a:srgbClr val="00B050"/>
+                    </a:solidFill>
+                  </a:rPr>
+                  <a:t>única </a:t>
+                </a:r>
+                <a:r>
+                  <a:rPr lang="pt-BR" b="1" i="1" dirty="0" smtClean="0">
+                    <a:solidFill>
+                      <a:srgbClr val="00B050"/>
+                    </a:solidFill>
+                  </a:rPr>
+                  <a:t>amostra por vez</a:t>
+                </a:r>
+                <a:r>
+                  <a:rPr lang="pt-BR" dirty="0" smtClean="0"/>
+                  <a:t>, fazendo com que </a:t>
                 </a:r>
                 <a14:m>
                   <m:oMath xmlns:m="http://schemas.openxmlformats.org/officeDocument/2006/math">
                     <m:r>
                       <a:rPr lang="pt-BR" i="1">
                         <a:latin typeface="Cambria Math" panose="02040503050406030204" pitchFamily="18" charset="0"/>
-                        <a:ea typeface="Cambria Math" panose="02040503050406030204" pitchFamily="18" charset="0"/>
                       </a:rPr>
-                      <m:t>𝛼</m:t>
+                      <m:t>𝑔</m:t>
                     </m:r>
+                    <m:d>
+                      <m:dPr>
+                        <m:ctrlPr>
+                          <a:rPr lang="pt-BR" i="1">
+                            <a:latin typeface="Cambria Math" panose="02040503050406030204" pitchFamily="18" charset="0"/>
+                          </a:rPr>
+                        </m:ctrlPr>
+                      </m:dPr>
+                      <m:e>
+                        <m:r>
+                          <a:rPr lang="pt-BR" b="1" i="1">
+                            <a:latin typeface="Cambria Math" panose="02040503050406030204" pitchFamily="18" charset="0"/>
+                          </a:rPr>
+                          <m:t>𝒙</m:t>
+                        </m:r>
+                      </m:e>
+                    </m:d>
                   </m:oMath>
                 </a14:m>
                 <a:r>
-                  <a:rPr lang="pt-BR" dirty="0"/>
-                  <a:t>, assim como acontece com o GDE.</a:t>
-                </a:r>
-              </a:p>
-              <a:p>
-                <a:r>
-                  <a:rPr lang="pt-BR" dirty="0"/>
-                  <a:t>Não há </a:t>
-                </a:r>
-                <a:r>
                   <a:rPr lang="pt-BR" dirty="0" smtClean="0"/>
-                  <a:t>convergência, </a:t>
-                </a:r>
-                <a:r>
-                  <a:rPr lang="pt-BR" dirty="0"/>
-                  <a:t>pois o objetivo é encontrar um erro de </a:t>
-                </a:r>
-                <a:r>
-                  <a:rPr lang="pt-BR" dirty="0" smtClean="0"/>
-                  <a:t>igual </a:t>
-                </a:r>
-                <a:r>
-                  <a:rPr lang="pt-BR" dirty="0"/>
-                  <a:t>a 0</a:t>
+                  <a:t> </a:t>
+                </a:r>
+                <a:r>
+                  <a:rPr lang="pt-BR" b="1" i="1" dirty="0" smtClean="0">
+                    <a:solidFill>
+                      <a:srgbClr val="00B050"/>
+                    </a:solidFill>
+                  </a:rPr>
+                  <a:t>mude de posição a cada atualização</a:t>
                 </a:r>
                 <a:r>
                   <a:rPr lang="pt-BR" dirty="0" smtClean="0"/>
                   <a:t>.</a:t>
                 </a:r>
-              </a:p>
-              <a:p>
-                <a:r>
-                  <a:rPr lang="pt-BR" dirty="0" smtClean="0"/>
-                  <a:t>Além disso, os pesos são ajustados para uma única amostra por vez.</a:t>
-                </a:r>
-                <a:endParaRPr lang="pt-BR" dirty="0"/>
               </a:p>
             </p:txBody>
           </p:sp>
         </mc:Choice>
-        <mc:Fallback xmlns="">
+        <mc:Fallback>
           <p:sp>
             <p:nvSpPr>
               <p:cNvPr id="3" name="Espaço Reservado para Conteúdo 2">
                 <a:extLst>
                   <a:ext uri="{FF2B5EF4-FFF2-40B4-BE49-F238E27FC236}">
-                    <a16:creationId xmlns="" xmlns:a16="http://schemas.microsoft.com/office/drawing/2014/main" xmlns:a14="http://schemas.microsoft.com/office/drawing/2010/main" id="{1B95DA0B-9FB2-61FE-86F8-6A65C4F51978}"/>
+                    <a16:creationId xmlns:a16="http://schemas.microsoft.com/office/drawing/2014/main" xmlns="" xmlns:a14="http://schemas.microsoft.com/office/drawing/2010/main" id="{1B95DA0B-9FB2-61FE-86F8-6A65C4F51978}"/>
                   </a:ext>
                 </a:extLst>
               </p:cNvPr>
@@ -17780,7 +17823,7 @@
               <a:blipFill rotWithShape="0">
                 <a:blip r:embed="rId3"/>
                 <a:stretch>
-                  <a:fillRect l="-1682" t="-1937" r="-2523"/>
+                  <a:fillRect l="-1682" t="-1937" r="-1963"/>
                 </a:stretch>
               </a:blipFill>
             </p:spPr>
@@ -17804,7 +17847,7 @@
           <p:cNvPr id="6" name="Imagem 5">
             <a:extLst>
               <a:ext uri="{FF2B5EF4-FFF2-40B4-BE49-F238E27FC236}">
-                <a16:creationId xmlns="" xmlns:a16="http://schemas.microsoft.com/office/drawing/2014/main" id="{51E800F4-4EF1-060E-4866-FAF7105FC993}"/>
+                <a16:creationId xmlns:a16="http://schemas.microsoft.com/office/drawing/2014/main" xmlns="" id="{51E800F4-4EF1-060E-4866-FAF7105FC993}"/>
               </a:ext>
             </a:extLst>
           </p:cNvPr>
@@ -17833,7 +17876,7 @@
           <p:cNvPr id="7" name="Conector reto 6">
             <a:extLst>
               <a:ext uri="{FF2B5EF4-FFF2-40B4-BE49-F238E27FC236}">
-                <a16:creationId xmlns="" xmlns:a16="http://schemas.microsoft.com/office/drawing/2014/main" id="{3D8F3701-F00B-FFBD-E048-5B4BEB1063B9}"/>
+                <a16:creationId xmlns:a16="http://schemas.microsoft.com/office/drawing/2014/main" xmlns="" id="{3D8F3701-F00B-FFBD-E048-5B4BEB1063B9}"/>
               </a:ext>
             </a:extLst>
           </p:cNvPr>
@@ -17874,7 +17917,7 @@
           <p:cNvPr id="8" name="Conector reto 7">
             <a:extLst>
               <a:ext uri="{FF2B5EF4-FFF2-40B4-BE49-F238E27FC236}">
-                <a16:creationId xmlns="" xmlns:a16="http://schemas.microsoft.com/office/drawing/2014/main" id="{379A4D02-30B5-EFB6-14C9-C0ED3378532A}"/>
+                <a16:creationId xmlns:a16="http://schemas.microsoft.com/office/drawing/2014/main" xmlns="" id="{379A4D02-30B5-EFB6-14C9-C0ED3378532A}"/>
               </a:ext>
             </a:extLst>
           </p:cNvPr>
@@ -17915,7 +17958,7 @@
           <p:cNvPr id="11" name="Conector de Seta Reta 10">
             <a:extLst>
               <a:ext uri="{FF2B5EF4-FFF2-40B4-BE49-F238E27FC236}">
-                <a16:creationId xmlns="" xmlns:a16="http://schemas.microsoft.com/office/drawing/2014/main" id="{0A78815D-AC06-0208-4006-098B3474FB0B}"/>
+                <a16:creationId xmlns:a16="http://schemas.microsoft.com/office/drawing/2014/main" xmlns="" id="{0A78815D-AC06-0208-4006-098B3474FB0B}"/>
               </a:ext>
             </a:extLst>
           </p:cNvPr>
@@ -17959,7 +18002,7 @@
           <p:cNvPr id="14" name="Conector de Seta Reta 13">
             <a:extLst>
               <a:ext uri="{FF2B5EF4-FFF2-40B4-BE49-F238E27FC236}">
-                <a16:creationId xmlns="" xmlns:a16="http://schemas.microsoft.com/office/drawing/2014/main" id="{4F8C8EB0-C19D-530A-7740-E886C3A77FCF}"/>
+                <a16:creationId xmlns:a16="http://schemas.microsoft.com/office/drawing/2014/main" xmlns="" id="{4F8C8EB0-C19D-530A-7740-E886C3A77FCF}"/>
               </a:ext>
             </a:extLst>
           </p:cNvPr>
@@ -18002,7 +18045,7 @@
               <p:cNvPr id="16" name="CaixaDeTexto 15">
                 <a:extLst>
                   <a:ext uri="{FF2B5EF4-FFF2-40B4-BE49-F238E27FC236}">
-                    <a16:creationId xmlns="" xmlns:a16="http://schemas.microsoft.com/office/drawing/2014/main" id="{D4D93B8E-F2A4-1E69-54A5-F0550E91736E}"/>
+                    <a16:creationId xmlns:a16="http://schemas.microsoft.com/office/drawing/2014/main" xmlns="" id="{D4D93B8E-F2A4-1E69-54A5-F0550E91736E}"/>
                   </a:ext>
                 </a:extLst>
               </p:cNvPr>
@@ -18127,7 +18170,7 @@
               <p:cNvPr id="18" name="CaixaDeTexto 17">
                 <a:extLst>
                   <a:ext uri="{FF2B5EF4-FFF2-40B4-BE49-F238E27FC236}">
-                    <a16:creationId xmlns="" xmlns:a16="http://schemas.microsoft.com/office/drawing/2014/main" id="{941F9E29-3D5B-7F7E-565A-94F4F6591E3F}"/>
+                    <a16:creationId xmlns:a16="http://schemas.microsoft.com/office/drawing/2014/main" xmlns="" id="{941F9E29-3D5B-7F7E-565A-94F4F6591E3F}"/>
                   </a:ext>
                 </a:extLst>
               </p:cNvPr>
@@ -18287,7 +18330,7 @@
           <p:cNvPr id="2" name="Título 1">
             <a:extLst>
               <a:ext uri="{FF2B5EF4-FFF2-40B4-BE49-F238E27FC236}">
-                <a16:creationId xmlns="" xmlns:a16="http://schemas.microsoft.com/office/drawing/2014/main" id="{CF9B30B4-0805-101B-C227-AD4405F0BA79}"/>
+                <a16:creationId xmlns:a16="http://schemas.microsoft.com/office/drawing/2014/main" xmlns="" id="{CF9B30B4-0805-101B-C227-AD4405F0BA79}"/>
               </a:ext>
             </a:extLst>
           </p:cNvPr>
@@ -18310,14 +18353,14 @@
           </a:p>
         </p:txBody>
       </p:sp>
-      <mc:AlternateContent xmlns:mc="http://schemas.openxmlformats.org/markup-compatibility/2006" xmlns:a14="http://schemas.microsoft.com/office/drawing/2010/main">
-        <mc:Choice Requires="a14">
+      <mc:AlternateContent xmlns:mc="http://schemas.openxmlformats.org/markup-compatibility/2006">
+        <mc:Choice xmlns:a14="http://schemas.microsoft.com/office/drawing/2010/main" Requires="a14">
           <p:sp>
             <p:nvSpPr>
               <p:cNvPr id="3" name="Espaço Reservado para Conteúdo 2">
                 <a:extLst>
                   <a:ext uri="{FF2B5EF4-FFF2-40B4-BE49-F238E27FC236}">
-                    <a16:creationId xmlns="" xmlns:a16="http://schemas.microsoft.com/office/drawing/2014/main" id="{1B95DA0B-9FB2-61FE-86F8-6A65C4F51978}"/>
+                    <a16:creationId xmlns:a16="http://schemas.microsoft.com/office/drawing/2014/main" xmlns="" id="{1B95DA0B-9FB2-61FE-86F8-6A65C4F51978}"/>
                   </a:ext>
                 </a:extLst>
               </p:cNvPr>
@@ -18376,12 +18419,21 @@
                       <a:srgbClr val="7030A0"/>
                     </a:solidFill>
                   </a:rPr>
-                  <a:t>erro mínimo </a:t>
-                </a:r>
-                <a:r>
-                  <a:rPr lang="pt-BR" dirty="0"/>
-                  <a:t>quando os exemplos são apresentados de forma aleatória.</a:t>
-                </a:r>
+                  <a:t>erro </a:t>
+                </a:r>
+                <a:r>
+                  <a:rPr lang="pt-BR" b="1" i="1" dirty="0" smtClean="0">
+                    <a:solidFill>
+                      <a:srgbClr val="7030A0"/>
+                    </a:solidFill>
+                  </a:rPr>
+                  <a:t>mínimo</a:t>
+                </a:r>
+                <a:r>
+                  <a:rPr lang="pt-BR" dirty="0" smtClean="0"/>
+                  <a:t>, mas não igual a zero.</a:t>
+                </a:r>
+                <a:endParaRPr lang="pt-BR" dirty="0"/>
               </a:p>
               <a:p>
                 <a:pPr lvl="1">
@@ -18390,7 +18442,15 @@
                 </a:pPr>
                 <a:r>
                   <a:rPr lang="pt-BR" dirty="0" smtClean="0"/>
-                  <a:t>Abordagem similar a que usamos com </a:t>
+                  <a:t>Abordagem similar </a:t>
+                </a:r>
+                <a:r>
+                  <a:rPr lang="pt-BR" dirty="0" smtClean="0"/>
+                  <a:t>à </a:t>
+                </a:r>
+                <a:r>
+                  <a:rPr lang="pt-BR" dirty="0" smtClean="0"/>
+                  <a:t>que usamos com </a:t>
                 </a:r>
                 <a:r>
                   <a:rPr lang="pt-BR" dirty="0"/>
@@ -18403,12 +18463,16 @@
                   <a:t>Podemos também usar o </a:t>
                 </a:r>
                 <a:r>
-                  <a:rPr lang="pt-BR" b="1" i="1" dirty="0"/>
-                  <a:t>early-stop</a:t>
+                  <a:rPr lang="pt-BR" b="1" i="1" dirty="0" err="1" smtClean="0"/>
+                  <a:t>early-stopping</a:t>
+                </a:r>
+                <a:r>
+                  <a:rPr lang="pt-BR" dirty="0" smtClean="0"/>
+                  <a:t> </a:t>
                 </a:r>
                 <a:r>
                   <a:rPr lang="pt-BR" dirty="0"/>
-                  <a:t> e </a:t>
+                  <a:t>e </a:t>
                 </a:r>
                 <a:r>
                   <a:rPr lang="pt-BR" b="1" i="1" dirty="0">
@@ -18458,13 +18522,13 @@
             </p:txBody>
           </p:sp>
         </mc:Choice>
-        <mc:Fallback xmlns="">
+        <mc:Fallback>
           <p:sp>
             <p:nvSpPr>
               <p:cNvPr id="3" name="Espaço Reservado para Conteúdo 2">
                 <a:extLst>
                   <a:ext uri="{FF2B5EF4-FFF2-40B4-BE49-F238E27FC236}">
-                    <a16:creationId xmlns="" xmlns:a16="http://schemas.microsoft.com/office/drawing/2014/main" xmlns:a14="http://schemas.microsoft.com/office/drawing/2010/main" id="{1B95DA0B-9FB2-61FE-86F8-6A65C4F51978}"/>
+                    <a16:creationId xmlns:a16="http://schemas.microsoft.com/office/drawing/2014/main" xmlns="" xmlns:a14="http://schemas.microsoft.com/office/drawing/2010/main" id="{1B95DA0B-9FB2-61FE-86F8-6A65C4F51978}"/>
                   </a:ext>
                 </a:extLst>
               </p:cNvPr>
@@ -18483,7 +18547,7 @@
               <a:blipFill rotWithShape="0">
                 <a:blip r:embed="rId3"/>
                 <a:stretch>
-                  <a:fillRect l="-1671" t="-1937" r="-93"/>
+                  <a:fillRect l="-1671" t="-1937" r="-1950"/>
                 </a:stretch>
               </a:blipFill>
             </p:spPr>
@@ -18507,7 +18571,7 @@
           <p:cNvPr id="4" name="Rectangle 3">
             <a:extLst>
               <a:ext uri="{FF2B5EF4-FFF2-40B4-BE49-F238E27FC236}">
-                <a16:creationId xmlns="" xmlns:a16="http://schemas.microsoft.com/office/drawing/2014/main" id="{C1A5A3C4-8FC4-F1E4-A1F3-D619B2FCB0C3}"/>
+                <a16:creationId xmlns:a16="http://schemas.microsoft.com/office/drawing/2014/main" xmlns="" id="{C1A5A3C4-8FC4-F1E4-A1F3-D619B2FCB0C3}"/>
               </a:ext>
             </a:extLst>
           </p:cNvPr>
@@ -18544,7 +18608,7 @@
           <p:cNvPr id="6" name="Imagem 5">
             <a:extLst>
               <a:ext uri="{FF2B5EF4-FFF2-40B4-BE49-F238E27FC236}">
-                <a16:creationId xmlns="" xmlns:a16="http://schemas.microsoft.com/office/drawing/2014/main" id="{51E800F4-4EF1-060E-4866-FAF7105FC993}"/>
+                <a16:creationId xmlns:a16="http://schemas.microsoft.com/office/drawing/2014/main" xmlns="" id="{51E800F4-4EF1-060E-4866-FAF7105FC993}"/>
               </a:ext>
             </a:extLst>
           </p:cNvPr>
@@ -18709,7 +18773,7 @@
           <p:cNvPr id="5" name="Imagem 4">
             <a:extLst>
               <a:ext uri="{FF2B5EF4-FFF2-40B4-BE49-F238E27FC236}">
-                <a16:creationId xmlns="" xmlns:a16="http://schemas.microsoft.com/office/drawing/2014/main" id="{5FD9BD3A-EECA-05F4-C300-1441F18AB71D}"/>
+                <a16:creationId xmlns:a16="http://schemas.microsoft.com/office/drawing/2014/main" xmlns="" id="{5FD9BD3A-EECA-05F4-C300-1441F18AB71D}"/>
               </a:ext>
             </a:extLst>
           </p:cNvPr>
@@ -18749,6 +18813,13 @@
   <p:clrMapOvr>
     <a:masterClrMapping/>
   </p:clrMapOvr>
+  <p:timing>
+    <p:tnLst>
+      <p:par>
+        <p:cTn id="1" dur="indefinite" restart="never" nodeType="tmRoot"/>
+      </p:par>
+    </p:tnLst>
+  </p:timing>
 </p:sld>
 </file>
 
@@ -18986,7 +19057,7 @@
           <p:cNvPr id="17" name="Agrupar 16">
             <a:extLst>
               <a:ext uri="{FF2B5EF4-FFF2-40B4-BE49-F238E27FC236}">
-                <a16:creationId xmlns="" xmlns:a16="http://schemas.microsoft.com/office/drawing/2014/main" id="{852A6A1D-DA43-B970-7D3B-CD86E9299F8C}"/>
+                <a16:creationId xmlns:a16="http://schemas.microsoft.com/office/drawing/2014/main" xmlns="" id="{852A6A1D-DA43-B970-7D3B-CD86E9299F8C}"/>
               </a:ext>
             </a:extLst>
           </p:cNvPr>
@@ -19006,7 +19077,7 @@
             <p:cNvPr id="13" name="Imagem 12">
               <a:extLst>
                 <a:ext uri="{FF2B5EF4-FFF2-40B4-BE49-F238E27FC236}">
-                  <a16:creationId xmlns="" xmlns:a16="http://schemas.microsoft.com/office/drawing/2014/main" id="{4B4DD64C-FB97-65B7-AD47-6491E6E5E7F1}"/>
+                  <a16:creationId xmlns:a16="http://schemas.microsoft.com/office/drawing/2014/main" xmlns="" id="{4B4DD64C-FB97-65B7-AD47-6491E6E5E7F1}"/>
                 </a:ext>
               </a:extLst>
             </p:cNvPr>
@@ -19041,7 +19112,7 @@
             <p:cNvPr id="6" name="Picture 16">
               <a:extLst>
                 <a:ext uri="{FF2B5EF4-FFF2-40B4-BE49-F238E27FC236}">
-                  <a16:creationId xmlns="" xmlns:a16="http://schemas.microsoft.com/office/drawing/2014/main" id="{256166DD-0A30-8757-3512-E3DEA440F495}"/>
+                  <a16:creationId xmlns:a16="http://schemas.microsoft.com/office/drawing/2014/main" xmlns="" id="{256166DD-0A30-8757-3512-E3DEA440F495}"/>
                 </a:ext>
               </a:extLst>
             </p:cNvPr>
@@ -19072,7 +19143,7 @@
                 <p:cNvPr id="8" name="CaixaDeTexto 7">
                   <a:extLst>
                     <a:ext uri="{FF2B5EF4-FFF2-40B4-BE49-F238E27FC236}">
-                      <a16:creationId xmlns="" xmlns:a16="http://schemas.microsoft.com/office/drawing/2014/main" id="{FE29F1DF-B6FA-783E-169F-125859E9A35D}"/>
+                      <a16:creationId xmlns:a16="http://schemas.microsoft.com/office/drawing/2014/main" xmlns="" id="{FE29F1DF-B6FA-783E-169F-125859E9A35D}"/>
                     </a:ext>
                   </a:extLst>
                 </p:cNvPr>
@@ -19188,7 +19259,7 @@
                 <p:cNvPr id="9" name="CaixaDeTexto 8">
                   <a:extLst>
                     <a:ext uri="{FF2B5EF4-FFF2-40B4-BE49-F238E27FC236}">
-                      <a16:creationId xmlns="" xmlns:a16="http://schemas.microsoft.com/office/drawing/2014/main" id="{4C0855C4-B563-8234-DFE3-4B6C2B7E81F9}"/>
+                      <a16:creationId xmlns:a16="http://schemas.microsoft.com/office/drawing/2014/main" xmlns="" id="{4C0855C4-B563-8234-DFE3-4B6C2B7E81F9}"/>
                     </a:ext>
                   </a:extLst>
                 </p:cNvPr>
@@ -19319,7 +19390,7 @@
             <p:cNvPr id="11" name="Retângulo 10">
               <a:extLst>
                 <a:ext uri="{FF2B5EF4-FFF2-40B4-BE49-F238E27FC236}">
-                  <a16:creationId xmlns="" xmlns:a16="http://schemas.microsoft.com/office/drawing/2014/main" id="{C66842E7-77DB-DED6-551A-CFBE055B87A7}"/>
+                  <a16:creationId xmlns:a16="http://schemas.microsoft.com/office/drawing/2014/main" xmlns="" id="{C66842E7-77DB-DED6-551A-CFBE055B87A7}"/>
                 </a:ext>
               </a:extLst>
             </p:cNvPr>
@@ -19371,7 +19442,7 @@
             <p:cNvPr id="15" name="Conector de Seta Reta 14">
               <a:extLst>
                 <a:ext uri="{FF2B5EF4-FFF2-40B4-BE49-F238E27FC236}">
-                  <a16:creationId xmlns="" xmlns:a16="http://schemas.microsoft.com/office/drawing/2014/main" id="{851D0E37-E94F-E50F-4120-E98CB2FF97BE}"/>
+                  <a16:creationId xmlns:a16="http://schemas.microsoft.com/office/drawing/2014/main" xmlns="" id="{851D0E37-E94F-E50F-4120-E98CB2FF97BE}"/>
                 </a:ext>
               </a:extLst>
             </p:cNvPr>
@@ -19421,6 +19492,13 @@
   <p:clrMapOvr>
     <a:masterClrMapping/>
   </p:clrMapOvr>
+  <p:timing>
+    <p:tnLst>
+      <p:par>
+        <p:cTn id="1" dur="indefinite" restart="never" nodeType="tmRoot"/>
+      </p:par>
+    </p:tnLst>
+  </p:timing>
 </p:sld>
 </file>
 
@@ -19432,7 +19510,7 @@
         <p:cNvPr id="1" name="">
           <a:extLst>
             <a:ext uri="{FF2B5EF4-FFF2-40B4-BE49-F238E27FC236}">
-              <a16:creationId xmlns="" xmlns:a16="http://schemas.microsoft.com/office/drawing/2014/main" id="{CD6791E6-EFE7-E1D0-A05B-6A033903D8B9}"/>
+              <a16:creationId xmlns:a16="http://schemas.microsoft.com/office/drawing/2014/main" xmlns="" id="{CD6791E6-EFE7-E1D0-A05B-6A033903D8B9}"/>
             </a:ext>
           </a:extLst>
         </p:cNvPr>
@@ -19452,7 +19530,7 @@
           <p:cNvPr id="2" name="Title 1">
             <a:extLst>
               <a:ext uri="{FF2B5EF4-FFF2-40B4-BE49-F238E27FC236}">
-                <a16:creationId xmlns="" xmlns:a16="http://schemas.microsoft.com/office/drawing/2014/main" id="{F647D7A8-0C38-A228-6137-93F608F4D4C0}"/>
+                <a16:creationId xmlns:a16="http://schemas.microsoft.com/office/drawing/2014/main" xmlns="" id="{F647D7A8-0C38-A228-6137-93F608F4D4C0}"/>
               </a:ext>
             </a:extLst>
           </p:cNvPr>
@@ -19475,14 +19553,14 @@
           </a:p>
         </p:txBody>
       </p:sp>
-      <mc:AlternateContent xmlns:mc="http://schemas.openxmlformats.org/markup-compatibility/2006" xmlns:a14="http://schemas.microsoft.com/office/drawing/2010/main">
-        <mc:Choice Requires="a14">
+      <mc:AlternateContent xmlns:mc="http://schemas.openxmlformats.org/markup-compatibility/2006">
+        <mc:Choice xmlns:a14="http://schemas.microsoft.com/office/drawing/2010/main" Requires="a14">
           <p:sp>
             <p:nvSpPr>
               <p:cNvPr id="3" name="Content Placeholder 2">
                 <a:extLst>
                   <a:ext uri="{FF2B5EF4-FFF2-40B4-BE49-F238E27FC236}">
-                    <a16:creationId xmlns="" xmlns:a16="http://schemas.microsoft.com/office/drawing/2014/main" id="{A01A9599-51A6-118D-65E9-1C6C3DD1B35B}"/>
+                    <a16:creationId xmlns:a16="http://schemas.microsoft.com/office/drawing/2014/main" xmlns="" id="{A01A9599-51A6-118D-65E9-1C6C3DD1B35B}"/>
                   </a:ext>
                 </a:extLst>
               </p:cNvPr>
@@ -19563,20 +19641,21 @@
                       <a:srgbClr val="00B050"/>
                     </a:solidFill>
                   </a:rPr>
-                  <a:t>pertencerem à classe da região onde se encontram e não serem </a:t>
-                </a:r>
-                <a:r>
-                  <a:rPr lang="pt-BR" b="1" i="1" dirty="0">
+                  <a:t>pertencerem à </a:t>
+                </a:r>
+                <a:r>
+                  <a:rPr lang="pt-BR" b="1" i="1" dirty="0" smtClean="0">
                     <a:solidFill>
-                      <a:srgbClr val="7030A0"/>
+                      <a:srgbClr val="00B050"/>
                     </a:solidFill>
                   </a:rPr>
-                  <a:t>outliers</a:t>
-                </a:r>
-                <a:r>
-                  <a:rPr lang="pt-BR" dirty="0"/>
+                  <a:t>classe onde estão</a:t>
+                </a:r>
+                <a:r>
+                  <a:rPr lang="pt-BR" dirty="0" smtClean="0"/>
                   <a:t>.</a:t>
                 </a:r>
+                <a:endParaRPr lang="pt-BR" dirty="0"/>
               </a:p>
               <a:p>
                 <a:pPr lvl="1">
@@ -19626,7 +19705,31 @@
               <a:p>
                 <a:r>
                   <a:rPr lang="pt-BR" dirty="0" smtClean="0"/>
-                  <a:t>Por outro lado, exemplos próximos da fronteira têm probabilidade menor de pertencerem à classe onde estão.</a:t>
+                  <a:t>Por outro lado, exemplos </a:t>
+                </a:r>
+                <a:r>
+                  <a:rPr lang="pt-BR" b="1" i="1" dirty="0" smtClean="0">
+                    <a:solidFill>
+                      <a:schemeClr val="accent2"/>
+                    </a:solidFill>
+                  </a:rPr>
+                  <a:t>próximos da fronteira</a:t>
+                </a:r>
+                <a:r>
+                  <a:rPr lang="pt-BR" dirty="0" smtClean="0"/>
+                  <a:t> têm </a:t>
+                </a:r>
+                <a:r>
+                  <a:rPr lang="pt-BR" b="1" i="1" dirty="0" smtClean="0">
+                    <a:solidFill>
+                      <a:schemeClr val="accent2"/>
+                    </a:solidFill>
+                  </a:rPr>
+                  <a:t>probabilidade menor </a:t>
+                </a:r>
+                <a:r>
+                  <a:rPr lang="pt-BR" dirty="0" smtClean="0"/>
+                  <a:t>de pertencerem à classe onde estão.</a:t>
                 </a:r>
               </a:p>
               <a:p>
@@ -19694,13 +19797,13 @@
             </p:txBody>
           </p:sp>
         </mc:Choice>
-        <mc:Fallback xmlns="">
+        <mc:Fallback>
           <p:sp>
             <p:nvSpPr>
               <p:cNvPr id="3" name="Content Placeholder 2">
                 <a:extLst>
                   <a:ext uri="{FF2B5EF4-FFF2-40B4-BE49-F238E27FC236}">
-                    <a16:creationId xmlns="" xmlns:a16="http://schemas.microsoft.com/office/drawing/2014/main" xmlns:a14="http://schemas.microsoft.com/office/drawing/2010/main" id="{A01A9599-51A6-118D-65E9-1C6C3DD1B35B}"/>
+                    <a16:creationId xmlns:a16="http://schemas.microsoft.com/office/drawing/2014/main" xmlns="" xmlns:a14="http://schemas.microsoft.com/office/drawing/2010/main" id="{A01A9599-51A6-118D-65E9-1C6C3DD1B35B}"/>
                   </a:ext>
                 </a:extLst>
               </p:cNvPr>
@@ -19743,7 +19846,7 @@
           <p:cNvPr id="17" name="Agrupar 16">
             <a:extLst>
               <a:ext uri="{FF2B5EF4-FFF2-40B4-BE49-F238E27FC236}">
-                <a16:creationId xmlns="" xmlns:a16="http://schemas.microsoft.com/office/drawing/2014/main" id="{610F2454-5C0C-EBCE-6D40-BB0B5F6AE729}"/>
+                <a16:creationId xmlns:a16="http://schemas.microsoft.com/office/drawing/2014/main" xmlns="" id="{610F2454-5C0C-EBCE-6D40-BB0B5F6AE729}"/>
               </a:ext>
             </a:extLst>
           </p:cNvPr>
@@ -19763,7 +19866,7 @@
             <p:cNvPr id="13" name="Imagem 12">
               <a:extLst>
                 <a:ext uri="{FF2B5EF4-FFF2-40B4-BE49-F238E27FC236}">
-                  <a16:creationId xmlns="" xmlns:a16="http://schemas.microsoft.com/office/drawing/2014/main" id="{33700BB8-7472-8A01-B6CF-778135215578}"/>
+                  <a16:creationId xmlns:a16="http://schemas.microsoft.com/office/drawing/2014/main" xmlns="" id="{33700BB8-7472-8A01-B6CF-778135215578}"/>
                 </a:ext>
               </a:extLst>
             </p:cNvPr>
@@ -19798,7 +19901,7 @@
             <p:cNvPr id="6" name="Picture 16">
               <a:extLst>
                 <a:ext uri="{FF2B5EF4-FFF2-40B4-BE49-F238E27FC236}">
-                  <a16:creationId xmlns="" xmlns:a16="http://schemas.microsoft.com/office/drawing/2014/main" id="{ADF86BCB-2A4B-0998-76DA-72007576463A}"/>
+                  <a16:creationId xmlns:a16="http://schemas.microsoft.com/office/drawing/2014/main" xmlns="" id="{ADF86BCB-2A4B-0998-76DA-72007576463A}"/>
                 </a:ext>
               </a:extLst>
             </p:cNvPr>
@@ -19829,7 +19932,7 @@
                 <p:cNvPr id="8" name="CaixaDeTexto 7">
                   <a:extLst>
                     <a:ext uri="{FF2B5EF4-FFF2-40B4-BE49-F238E27FC236}">
-                      <a16:creationId xmlns="" xmlns:a16="http://schemas.microsoft.com/office/drawing/2014/main" id="{D6B287CA-CBF9-5090-D89E-5B46CA2AFD64}"/>
+                      <a16:creationId xmlns:a16="http://schemas.microsoft.com/office/drawing/2014/main" xmlns="" id="{D6B287CA-CBF9-5090-D89E-5B46CA2AFD64}"/>
                     </a:ext>
                   </a:extLst>
                 </p:cNvPr>
@@ -19945,7 +20048,7 @@
                 <p:cNvPr id="9" name="CaixaDeTexto 8">
                   <a:extLst>
                     <a:ext uri="{FF2B5EF4-FFF2-40B4-BE49-F238E27FC236}">
-                      <a16:creationId xmlns="" xmlns:a16="http://schemas.microsoft.com/office/drawing/2014/main" id="{31EAD500-6617-C59D-3E5F-E7C10E98A2F0}"/>
+                      <a16:creationId xmlns:a16="http://schemas.microsoft.com/office/drawing/2014/main" xmlns="" id="{31EAD500-6617-C59D-3E5F-E7C10E98A2F0}"/>
                     </a:ext>
                   </a:extLst>
                 </p:cNvPr>
@@ -20076,7 +20179,7 @@
             <p:cNvPr id="11" name="Retângulo 10">
               <a:extLst>
                 <a:ext uri="{FF2B5EF4-FFF2-40B4-BE49-F238E27FC236}">
-                  <a16:creationId xmlns="" xmlns:a16="http://schemas.microsoft.com/office/drawing/2014/main" id="{BB6201C2-52AB-88DF-1039-4C291CBFE4B3}"/>
+                  <a16:creationId xmlns:a16="http://schemas.microsoft.com/office/drawing/2014/main" xmlns="" id="{BB6201C2-52AB-88DF-1039-4C291CBFE4B3}"/>
                 </a:ext>
               </a:extLst>
             </p:cNvPr>
@@ -20128,7 +20231,7 @@
             <p:cNvPr id="15" name="Conector de Seta Reta 14">
               <a:extLst>
                 <a:ext uri="{FF2B5EF4-FFF2-40B4-BE49-F238E27FC236}">
-                  <a16:creationId xmlns="" xmlns:a16="http://schemas.microsoft.com/office/drawing/2014/main" id="{50C4842E-E5F8-047C-A23B-F98AD0098206}"/>
+                  <a16:creationId xmlns:a16="http://schemas.microsoft.com/office/drawing/2014/main" xmlns="" id="{50C4842E-E5F8-047C-A23B-F98AD0098206}"/>
                 </a:ext>
               </a:extLst>
             </p:cNvPr>
@@ -20178,6 +20281,13 @@
   <p:clrMapOvr>
     <a:masterClrMapping/>
   </p:clrMapOvr>
+  <p:timing>
+    <p:tnLst>
+      <p:par>
+        <p:cTn id="1" dur="indefinite" restart="never" nodeType="tmRoot"/>
+      </p:par>
+    </p:tnLst>
+  </p:timing>
 </p:sld>
 </file>
 
@@ -20220,8 +20330,8 @@
           </a:p>
         </p:txBody>
       </p:sp>
-      <mc:AlternateContent xmlns:mc="http://schemas.openxmlformats.org/markup-compatibility/2006" xmlns:a14="http://schemas.microsoft.com/office/drawing/2010/main">
-        <mc:Choice Requires="a14">
+      <mc:AlternateContent xmlns:mc="http://schemas.openxmlformats.org/markup-compatibility/2006">
+        <mc:Choice xmlns:a14="http://schemas.microsoft.com/office/drawing/2010/main" Requires="a14">
           <p:sp>
             <p:nvSpPr>
               <p:cNvPr id="3" name="Content Placeholder 2"/>
@@ -20246,7 +20356,11 @@
               <a:p>
                 <a:r>
                   <a:rPr lang="pt-BR" dirty="0"/>
-                  <a:t>Assim, usando </a:t>
+                  <a:t>Assim, </a:t>
+                </a:r>
+                <a:r>
+                  <a:rPr lang="pt-BR" dirty="0" smtClean="0"/>
+                  <a:t>usando o </a:t>
                 </a:r>
                 <a:r>
                   <a:rPr lang="pt-BR" b="1" i="1" dirty="0"/>
@@ -20254,12 +20368,23 @@
                 </a:r>
                 <a:r>
                   <a:rPr lang="pt-BR" dirty="0"/>
-                  <a:t>, os dois </a:t>
+                  <a:t>, os </a:t>
+                </a:r>
+                <a:endParaRPr lang="pt-BR" dirty="0" smtClean="0"/>
+              </a:p>
+              <a:p>
+                <a:pPr lvl="1">
+                  <a:buFont typeface="Wingdings" panose="05000000000000000000" pitchFamily="2" charset="2"/>
+                  <a:buChar char="§"/>
+                </a:pPr>
+                <a:r>
+                  <a:rPr lang="pt-BR" dirty="0" smtClean="0"/>
+                  <a:t>dois </a:t>
                 </a:r>
                 <a:r>
                   <a:rPr lang="pt-BR" b="1" i="1" dirty="0">
                     <a:solidFill>
-                      <a:srgbClr val="00B050"/>
+                      <a:schemeClr val="accent5"/>
                     </a:solidFill>
                   </a:rPr>
                   <a:t>pontos azuis </a:t>
@@ -20271,19 +20396,34 @@
                 <a:r>
                   <a:rPr lang="pt-BR" b="1" i="1" dirty="0">
                     <a:solidFill>
-                      <a:srgbClr val="00B050"/>
+                      <a:schemeClr val="accent5"/>
                     </a:solidFill>
                   </a:rPr>
                   <a:t>classe negativa </a:t>
                 </a:r>
                 <a:r>
                   <a:rPr lang="pt-BR" dirty="0"/>
-                  <a:t>(valor 0) e os dois </a:t>
+                  <a:t>(valor 0) e </a:t>
+                </a:r>
+                <a:endParaRPr lang="pt-BR" dirty="0" smtClean="0"/>
+              </a:p>
+              <a:p>
+                <a:pPr lvl="1">
+                  <a:buFont typeface="Wingdings" panose="05000000000000000000" pitchFamily="2" charset="2"/>
+                  <a:buChar char="§"/>
+                </a:pPr>
+                <a:r>
+                  <a:rPr lang="pt-BR" dirty="0" smtClean="0"/>
+                  <a:t>os </a:t>
+                </a:r>
+                <a:r>
+                  <a:rPr lang="pt-BR" dirty="0"/>
+                  <a:t>dois </a:t>
                 </a:r>
                 <a:r>
                   <a:rPr lang="pt-BR" b="1" i="1" dirty="0">
                     <a:solidFill>
-                      <a:srgbClr val="00B050"/>
+                      <a:srgbClr val="FF0000"/>
                     </a:solidFill>
                   </a:rPr>
                   <a:t>triângulos vermelhos </a:t>
@@ -20295,26 +20435,52 @@
                 <a:r>
                   <a:rPr lang="pt-BR" b="1" i="1" dirty="0">
                     <a:solidFill>
-                      <a:srgbClr val="00B050"/>
+                      <a:srgbClr val="FF0000"/>
                     </a:solidFill>
                   </a:rPr>
                   <a:t>classe</a:t>
                 </a:r>
                 <a:r>
-                  <a:rPr lang="pt-BR" dirty="0"/>
+                  <a:rPr lang="pt-BR" dirty="0">
+                    <a:solidFill>
+                      <a:srgbClr val="FF0000"/>
+                    </a:solidFill>
+                  </a:rPr>
                   <a:t> </a:t>
                 </a:r>
                 <a:r>
                   <a:rPr lang="pt-BR" b="1" i="1" dirty="0">
                     <a:solidFill>
-                      <a:srgbClr val="00B050"/>
+                      <a:srgbClr val="FF0000"/>
                     </a:solidFill>
                   </a:rPr>
                   <a:t>positiva</a:t>
                 </a:r>
                 <a:r>
+                  <a:rPr lang="pt-BR" dirty="0">
+                    <a:solidFill>
+                      <a:srgbClr val="FF0000"/>
+                    </a:solidFill>
+                  </a:rPr>
+                  <a:t> </a:t>
+                </a:r>
+                <a:r>
                   <a:rPr lang="pt-BR" dirty="0"/>
-                  <a:t> (valor 1), mesmo tendo valores </a:t>
+                  <a:t>(valor 1), </a:t>
+                </a:r>
+                <a:endParaRPr lang="pt-BR" dirty="0" smtClean="0"/>
+              </a:p>
+              <a:p>
+                <a:pPr marL="0" indent="0">
+                  <a:buNone/>
+                </a:pPr>
+                <a:r>
+                  <a:rPr lang="pt-BR" dirty="0" smtClean="0"/>
+                  <a:t>mesmo </a:t>
+                </a:r>
+                <a:r>
+                  <a:rPr lang="pt-BR" dirty="0"/>
+                  <a:t>tendo valores </a:t>
                 </a:r>
                 <a:r>
                   <a:rPr lang="pt-BR" b="1" i="1" dirty="0">
@@ -20365,98 +20531,15 @@
                   <a:t>bem diferentes</a:t>
                 </a:r>
                 <a:r>
-                  <a:rPr lang="pt-BR" dirty="0"/>
+                  <a:rPr lang="pt-BR" dirty="0" smtClean="0"/>
                   <a:t>.</a:t>
                 </a:r>
-              </a:p>
-              <a:p>
-                <a:pPr lvl="1">
-                  <a:buFont typeface="Wingdings" panose="05000000000000000000" pitchFamily="2" charset="2"/>
-                  <a:buChar char="§"/>
-                </a:pPr>
-                <a:r>
-                  <a:rPr lang="pt-BR" dirty="0"/>
-                  <a:t>Pontos muito próximos da fronteira de decisão têm valor absoluto de </a:t>
-                </a:r>
-                <a14:m>
-                  <m:oMath xmlns:m="http://schemas.openxmlformats.org/officeDocument/2006/math">
-                    <m:r>
-                      <a:rPr lang="pt-BR" b="0" i="1" smtClean="0">
-                        <a:latin typeface="Cambria Math" panose="02040503050406030204" pitchFamily="18" charset="0"/>
-                      </a:rPr>
-                      <m:t>𝑔</m:t>
-                    </m:r>
-                    <m:r>
-                      <a:rPr lang="pt-BR" b="0" i="1" smtClean="0">
-                        <a:latin typeface="Cambria Math" panose="02040503050406030204" pitchFamily="18" charset="0"/>
-                      </a:rPr>
-                      <m:t>(</m:t>
-                    </m:r>
-                    <m:r>
-                      <a:rPr lang="pt-BR" b="1" i="1" smtClean="0">
-                        <a:latin typeface="Cambria Math" panose="02040503050406030204" pitchFamily="18" charset="0"/>
-                      </a:rPr>
-                      <m:t>𝒙</m:t>
-                    </m:r>
-                    <m:r>
-                      <a:rPr lang="pt-BR" b="0" i="1" smtClean="0">
-                        <a:latin typeface="Cambria Math" panose="02040503050406030204" pitchFamily="18" charset="0"/>
-                      </a:rPr>
-                      <m:t>)</m:t>
-                    </m:r>
-                  </m:oMath>
-                </a14:m>
-                <a:r>
-                  <a:rPr lang="pt-BR" dirty="0"/>
-                  <a:t> próximo de zero.</a:t>
-                </a:r>
-              </a:p>
-              <a:p>
-                <a:pPr lvl="1">
-                  <a:buFont typeface="Wingdings" panose="05000000000000000000" pitchFamily="2" charset="2"/>
-                  <a:buChar char="§"/>
-                </a:pPr>
-                <a:r>
-                  <a:rPr lang="pt-BR" dirty="0"/>
-                  <a:t>Já pontos muito distantes têm valor absoluto de </a:t>
-                </a:r>
-                <a14:m>
-                  <m:oMath xmlns:m="http://schemas.openxmlformats.org/officeDocument/2006/math">
-                    <m:r>
-                      <a:rPr lang="pt-BR" b="0" i="1" smtClean="0">
-                        <a:latin typeface="Cambria Math" panose="02040503050406030204" pitchFamily="18" charset="0"/>
-                      </a:rPr>
-                      <m:t>𝑔</m:t>
-                    </m:r>
-                    <m:r>
-                      <a:rPr lang="pt-BR" b="0" i="1" smtClean="0">
-                        <a:latin typeface="Cambria Math" panose="02040503050406030204" pitchFamily="18" charset="0"/>
-                      </a:rPr>
-                      <m:t>(</m:t>
-                    </m:r>
-                    <m:r>
-                      <a:rPr lang="pt-BR" b="1" i="1" smtClean="0">
-                        <a:latin typeface="Cambria Math" panose="02040503050406030204" pitchFamily="18" charset="0"/>
-                      </a:rPr>
-                      <m:t>𝒙</m:t>
-                    </m:r>
-                    <m:r>
-                      <a:rPr lang="pt-BR" b="0" i="1" smtClean="0">
-                        <a:latin typeface="Cambria Math" panose="02040503050406030204" pitchFamily="18" charset="0"/>
-                      </a:rPr>
-                      <m:t>)</m:t>
-                    </m:r>
-                  </m:oMath>
-                </a14:m>
-                <a:r>
-                  <a:rPr lang="pt-BR" dirty="0"/>
-                  <a:t> muito maior do que zero.</a:t>
-                </a:r>
+                <a:endParaRPr lang="pt-BR" dirty="0"/>
               </a:p>
             </p:txBody>
           </p:sp>
         </mc:Choice>
-        <mc:Fallback xmlns="">
+        <mc:Fallback>
           <p:sp>
             <p:nvSpPr>
               <p:cNvPr id="3" name="Content Placeholder 2"/>
@@ -20472,10 +20555,10 @@
                 <a:off x="5053783" y="1825624"/>
                 <a:ext cx="6987796" cy="5032376"/>
               </a:xfrm>
-              <a:blipFill>
+              <a:blipFill rotWithShape="0">
                 <a:blip r:embed="rId3"/>
                 <a:stretch>
-                  <a:fillRect l="-1571" t="-1937" r="-2531"/>
+                  <a:fillRect l="-1745" t="-1937"/>
                 </a:stretch>
               </a:blipFill>
             </p:spPr>
@@ -20499,7 +20582,7 @@
           <p:cNvPr id="12" name="Agrupar 16">
             <a:extLst>
               <a:ext uri="{FF2B5EF4-FFF2-40B4-BE49-F238E27FC236}">
-                <a16:creationId xmlns="" xmlns:a16="http://schemas.microsoft.com/office/drawing/2014/main" id="{852A6A1D-DA43-B970-7D3B-CD86E9299F8C}"/>
+                <a16:creationId xmlns:a16="http://schemas.microsoft.com/office/drawing/2014/main" xmlns="" id="{852A6A1D-DA43-B970-7D3B-CD86E9299F8C}"/>
               </a:ext>
             </a:extLst>
           </p:cNvPr>
@@ -20519,7 +20602,7 @@
             <p:cNvPr id="14" name="Imagem 13">
               <a:extLst>
                 <a:ext uri="{FF2B5EF4-FFF2-40B4-BE49-F238E27FC236}">
-                  <a16:creationId xmlns="" xmlns:a16="http://schemas.microsoft.com/office/drawing/2014/main" id="{4B4DD64C-FB97-65B7-AD47-6491E6E5E7F1}"/>
+                  <a16:creationId xmlns:a16="http://schemas.microsoft.com/office/drawing/2014/main" xmlns="" id="{4B4DD64C-FB97-65B7-AD47-6491E6E5E7F1}"/>
                 </a:ext>
               </a:extLst>
             </p:cNvPr>
@@ -20554,7 +20637,7 @@
             <p:cNvPr id="16" name="Picture 16">
               <a:extLst>
                 <a:ext uri="{FF2B5EF4-FFF2-40B4-BE49-F238E27FC236}">
-                  <a16:creationId xmlns="" xmlns:a16="http://schemas.microsoft.com/office/drawing/2014/main" id="{256166DD-0A30-8757-3512-E3DEA440F495}"/>
+                  <a16:creationId xmlns:a16="http://schemas.microsoft.com/office/drawing/2014/main" xmlns="" id="{256166DD-0A30-8757-3512-E3DEA440F495}"/>
                 </a:ext>
               </a:extLst>
             </p:cNvPr>
@@ -20585,7 +20668,7 @@
                 <p:cNvPr id="18" name="CaixaDeTexto 17">
                   <a:extLst>
                     <a:ext uri="{FF2B5EF4-FFF2-40B4-BE49-F238E27FC236}">
-                      <a16:creationId xmlns="" xmlns:a16="http://schemas.microsoft.com/office/drawing/2014/main" id="{FE29F1DF-B6FA-783E-169F-125859E9A35D}"/>
+                      <a16:creationId xmlns:a16="http://schemas.microsoft.com/office/drawing/2014/main" xmlns="" id="{FE29F1DF-B6FA-783E-169F-125859E9A35D}"/>
                     </a:ext>
                   </a:extLst>
                 </p:cNvPr>
@@ -20701,7 +20784,7 @@
                 <p:cNvPr id="19" name="CaixaDeTexto 18">
                   <a:extLst>
                     <a:ext uri="{FF2B5EF4-FFF2-40B4-BE49-F238E27FC236}">
-                      <a16:creationId xmlns="" xmlns:a16="http://schemas.microsoft.com/office/drawing/2014/main" id="{4C0855C4-B563-8234-DFE3-4B6C2B7E81F9}"/>
+                      <a16:creationId xmlns:a16="http://schemas.microsoft.com/office/drawing/2014/main" xmlns="" id="{4C0855C4-B563-8234-DFE3-4B6C2B7E81F9}"/>
                     </a:ext>
                   </a:extLst>
                 </p:cNvPr>
@@ -20832,7 +20915,7 @@
             <p:cNvPr id="20" name="Retângulo 19">
               <a:extLst>
                 <a:ext uri="{FF2B5EF4-FFF2-40B4-BE49-F238E27FC236}">
-                  <a16:creationId xmlns="" xmlns:a16="http://schemas.microsoft.com/office/drawing/2014/main" id="{C66842E7-77DB-DED6-551A-CFBE055B87A7}"/>
+                  <a16:creationId xmlns:a16="http://schemas.microsoft.com/office/drawing/2014/main" xmlns="" id="{C66842E7-77DB-DED6-551A-CFBE055B87A7}"/>
                 </a:ext>
               </a:extLst>
             </p:cNvPr>
@@ -20884,7 +20967,7 @@
             <p:cNvPr id="21" name="Conector de Seta Reta 14">
               <a:extLst>
                 <a:ext uri="{FF2B5EF4-FFF2-40B4-BE49-F238E27FC236}">
-                  <a16:creationId xmlns="" xmlns:a16="http://schemas.microsoft.com/office/drawing/2014/main" id="{851D0E37-E94F-E50F-4120-E98CB2FF97BE}"/>
+                  <a16:creationId xmlns:a16="http://schemas.microsoft.com/office/drawing/2014/main" xmlns="" id="{851D0E37-E94F-E50F-4120-E98CB2FF97BE}"/>
                 </a:ext>
               </a:extLst>
             </p:cNvPr>
@@ -20966,7 +21049,7 @@
           <p:cNvPr id="2" name="Título 1">
             <a:extLst>
               <a:ext uri="{FF2B5EF4-FFF2-40B4-BE49-F238E27FC236}">
-                <a16:creationId xmlns="" xmlns:a16="http://schemas.microsoft.com/office/drawing/2014/main" id="{D21F8F56-5724-DFC6-0D15-D186C211F203}"/>
+                <a16:creationId xmlns:a16="http://schemas.microsoft.com/office/drawing/2014/main" xmlns="" id="{D21F8F56-5724-DFC6-0D15-D186C211F203}"/>
               </a:ext>
             </a:extLst>
           </p:cNvPr>
@@ -20994,7 +21077,7 @@
           <p:cNvPr id="3" name="Espaço Reservado para Conteúdo 2">
             <a:extLst>
               <a:ext uri="{FF2B5EF4-FFF2-40B4-BE49-F238E27FC236}">
-                <a16:creationId xmlns="" xmlns:a16="http://schemas.microsoft.com/office/drawing/2014/main" id="{8C2770DA-BD52-05F3-F2B3-56BA4FC4C1F3}"/>
+                <a16:creationId xmlns:a16="http://schemas.microsoft.com/office/drawing/2014/main" xmlns="" id="{8C2770DA-BD52-05F3-F2B3-56BA4FC4C1F3}"/>
               </a:ext>
             </a:extLst>
           </p:cNvPr>
@@ -21098,7 +21181,19 @@
             <a:pPr marL="285750" indent="-285750"/>
             <a:r>
               <a:rPr lang="pt-BR" dirty="0"/>
-              <a:t>Entretanto, em muitas situações, nós precisamos de predições mais graduadas, que indiquem incertezas quanto à predição.</a:t>
+              <a:t>Entretanto, em muitas situações, nós precisamos de </a:t>
+            </a:r>
+            <a:r>
+              <a:rPr lang="pt-BR" b="1" i="1" dirty="0">
+                <a:solidFill>
+                  <a:schemeClr val="accent2"/>
+                </a:solidFill>
+              </a:rPr>
+              <a:t>predições mais graduadas</a:t>
+            </a:r>
+            <a:r>
+              <a:rPr lang="pt-BR" dirty="0"/>
+              <a:t>, que indiquem incertezas quanto à predição.</a:t>
             </a:r>
             <a:endParaRPr lang="pt-BR" sz="2800" dirty="0"/>
           </a:p>
@@ -21109,7 +21204,7 @@
           <p:cNvPr id="5" name="Imagem 4">
             <a:extLst>
               <a:ext uri="{FF2B5EF4-FFF2-40B4-BE49-F238E27FC236}">
-                <a16:creationId xmlns="" xmlns:a16="http://schemas.microsoft.com/office/drawing/2014/main" id="{37586BBD-40B1-F01B-4474-DE26CFC5EB64}"/>
+                <a16:creationId xmlns:a16="http://schemas.microsoft.com/office/drawing/2014/main" xmlns="" id="{37586BBD-40B1-F01B-4474-DE26CFC5EB64}"/>
               </a:ext>
             </a:extLst>
           </p:cNvPr>
@@ -21139,49 +21234,6 @@
           </a:prstGeom>
         </p:spPr>
       </p:pic>
-      <p:sp>
-        <p:nvSpPr>
-          <p:cNvPr id="4" name="Rectangle 3">
-            <a:extLst>
-              <a:ext uri="{FF2B5EF4-FFF2-40B4-BE49-F238E27FC236}">
-                <a16:creationId xmlns="" xmlns:a16="http://schemas.microsoft.com/office/drawing/2014/main" id="{8486856A-A906-F895-6B4C-453EFD40E6EF}"/>
-              </a:ext>
-            </a:extLst>
-          </p:cNvPr>
-          <p:cNvSpPr/>
-          <p:nvPr/>
-        </p:nvSpPr>
-        <p:spPr>
-          <a:xfrm>
-            <a:off x="9443106" y="6525566"/>
-            <a:ext cx="2748894" cy="307777"/>
-          </a:xfrm>
-          <a:prstGeom prst="rect">
-            <a:avLst/>
-          </a:prstGeom>
-        </p:spPr>
-        <p:txBody>
-          <a:bodyPr wrap="none">
-            <a:spAutoFit/>
-          </a:bodyPr>
-          <a:lstStyle/>
-          <a:p>
-            <a:r>
-              <a:rPr lang="pt-BR" sz="1400" dirty="0">
-                <a:hlinkClick r:id="rId4"/>
-              </a:rPr>
-              <a:t>Exemplo: </a:t>
-            </a:r>
-            <a:r>
-              <a:rPr lang="pt-BR" sz="1400" dirty="0" err="1">
-                <a:hlinkClick r:id="rId4"/>
-              </a:rPr>
-              <a:t>classificação_rígida.ipynb</a:t>
-            </a:r>
-            <a:endParaRPr lang="pt-BR" sz="1400" dirty="0"/>
-          </a:p>
-        </p:txBody>
-      </p:sp>
     </p:spTree>
     <p:extLst>
       <p:ext uri="{BB962C8B-B14F-4D97-AF65-F5344CB8AC3E}">
@@ -21388,7 +21440,7 @@
           <p:cNvPr id="4" name="Título 1">
             <a:extLst>
               <a:ext uri="{FF2B5EF4-FFF2-40B4-BE49-F238E27FC236}">
-                <a16:creationId xmlns="" xmlns:a16="http://schemas.microsoft.com/office/drawing/2014/main" id="{32666AC8-2E17-4DB4-B0F5-60C640CCFD2E}"/>
+                <a16:creationId xmlns:a16="http://schemas.microsoft.com/office/drawing/2014/main" xmlns="" id="{32666AC8-2E17-4DB4-B0F5-60C640CCFD2E}"/>
               </a:ext>
             </a:extLst>
           </p:cNvPr>
@@ -21449,6 +21501,13 @@
   <p:clrMapOvr>
     <a:masterClrMapping/>
   </p:clrMapOvr>
+  <p:timing>
+    <p:tnLst>
+      <p:par>
+        <p:cTn id="1" dur="indefinite" restart="never" nodeType="tmRoot"/>
+      </p:par>
+    </p:tnLst>
+  </p:timing>
 </p:sld>
 </file>
 
@@ -21735,7 +21794,7 @@
           <p:cNvPr id="13" name="Agrupar 12">
             <a:extLst>
               <a:ext uri="{FF2B5EF4-FFF2-40B4-BE49-F238E27FC236}">
-                <a16:creationId xmlns="" xmlns:a16="http://schemas.microsoft.com/office/drawing/2014/main" id="{3ABE398D-1CE6-E437-DE7B-7C0199280699}"/>
+                <a16:creationId xmlns:a16="http://schemas.microsoft.com/office/drawing/2014/main" xmlns="" id="{3ABE398D-1CE6-E437-DE7B-7C0199280699}"/>
               </a:ext>
             </a:extLst>
           </p:cNvPr>
@@ -21755,7 +21814,7 @@
             <p:cNvPr id="5" name="TextBox 10">
               <a:extLst>
                 <a:ext uri="{FF2B5EF4-FFF2-40B4-BE49-F238E27FC236}">
-                  <a16:creationId xmlns="" xmlns:a16="http://schemas.microsoft.com/office/drawing/2014/main" id="{CEB8A630-173E-340A-464A-959B78DC2FE4}"/>
+                  <a16:creationId xmlns:a16="http://schemas.microsoft.com/office/drawing/2014/main" xmlns="" id="{CEB8A630-173E-340A-464A-959B78DC2FE4}"/>
                 </a:ext>
               </a:extLst>
             </p:cNvPr>
@@ -21807,7 +21866,7 @@
             <p:cNvPr id="7" name="Picture 4">
               <a:extLst>
                 <a:ext uri="{FF2B5EF4-FFF2-40B4-BE49-F238E27FC236}">
-                  <a16:creationId xmlns="" xmlns:a16="http://schemas.microsoft.com/office/drawing/2014/main" id="{B3138423-D6F8-2D44-1667-917F11AD6E86}"/>
+                  <a16:creationId xmlns:a16="http://schemas.microsoft.com/office/drawing/2014/main" xmlns="" id="{B3138423-D6F8-2D44-1667-917F11AD6E86}"/>
                 </a:ext>
               </a:extLst>
             </p:cNvPr>
@@ -21842,7 +21901,7 @@
             <p:cNvPr id="8" name="TextBox 11">
               <a:extLst>
                 <a:ext uri="{FF2B5EF4-FFF2-40B4-BE49-F238E27FC236}">
-                  <a16:creationId xmlns="" xmlns:a16="http://schemas.microsoft.com/office/drawing/2014/main" id="{FC08E9EE-1561-4BEF-2AEE-727B2D5F8E2F}"/>
+                  <a16:creationId xmlns:a16="http://schemas.microsoft.com/office/drawing/2014/main" xmlns="" id="{FC08E9EE-1561-4BEF-2AEE-727B2D5F8E2F}"/>
                 </a:ext>
               </a:extLst>
             </p:cNvPr>
@@ -21890,7 +21949,7 @@
             <p:cNvPr id="9" name="Curved Connector 9">
               <a:extLst>
                 <a:ext uri="{FF2B5EF4-FFF2-40B4-BE49-F238E27FC236}">
-                  <a16:creationId xmlns="" xmlns:a16="http://schemas.microsoft.com/office/drawing/2014/main" id="{14E20E58-751B-FACF-872B-3CECD3A49E40}"/>
+                  <a16:creationId xmlns:a16="http://schemas.microsoft.com/office/drawing/2014/main" xmlns="" id="{14E20E58-751B-FACF-872B-3CECD3A49E40}"/>
                 </a:ext>
               </a:extLst>
             </p:cNvPr>
@@ -21938,7 +21997,7 @@
             <p:cNvPr id="10" name="TextBox 12">
               <a:extLst>
                 <a:ext uri="{FF2B5EF4-FFF2-40B4-BE49-F238E27FC236}">
-                  <a16:creationId xmlns="" xmlns:a16="http://schemas.microsoft.com/office/drawing/2014/main" id="{2AF0D625-C807-BD82-FA55-87271C135B34}"/>
+                  <a16:creationId xmlns:a16="http://schemas.microsoft.com/office/drawing/2014/main" xmlns="" id="{2AF0D625-C807-BD82-FA55-87271C135B34}"/>
                 </a:ext>
               </a:extLst>
             </p:cNvPr>
@@ -21987,7 +22046,7 @@
           <p:cNvPr id="1026" name="Picture 2" descr="GitHub - OleksandrKosovan/dog-cat-classification: The Dogs vs. Cats dataset  is a standard computer vision dataset that involves classifying photos as  either containing a dog or cat.">
             <a:extLst>
               <a:ext uri="{FF2B5EF4-FFF2-40B4-BE49-F238E27FC236}">
-                <a16:creationId xmlns="" xmlns:a16="http://schemas.microsoft.com/office/drawing/2014/main" id="{9B362008-3E26-A52F-A9E6-62106E0CB485}"/>
+                <a16:creationId xmlns:a16="http://schemas.microsoft.com/office/drawing/2014/main" xmlns="" id="{9B362008-3E26-A52F-A9E6-62106E0CB485}"/>
               </a:ext>
             </a:extLst>
           </p:cNvPr>
@@ -22032,7 +22091,7 @@
           <p:cNvPr id="17" name="Conector reto 16">
             <a:extLst>
               <a:ext uri="{FF2B5EF4-FFF2-40B4-BE49-F238E27FC236}">
-                <a16:creationId xmlns="" xmlns:a16="http://schemas.microsoft.com/office/drawing/2014/main" id="{43CEAD89-1DD5-95EC-5172-BB2EC94F5092}"/>
+                <a16:creationId xmlns:a16="http://schemas.microsoft.com/office/drawing/2014/main" xmlns="" id="{43CEAD89-1DD5-95EC-5172-BB2EC94F5092}"/>
               </a:ext>
             </a:extLst>
           </p:cNvPr>
@@ -22076,7 +22135,7 @@
           <p:cNvPr id="19" name="Conector reto 18">
             <a:extLst>
               <a:ext uri="{FF2B5EF4-FFF2-40B4-BE49-F238E27FC236}">
-                <a16:creationId xmlns="" xmlns:a16="http://schemas.microsoft.com/office/drawing/2014/main" id="{9AAE2E5B-3772-7BF4-7C5B-C632C605DD48}"/>
+                <a16:creationId xmlns:a16="http://schemas.microsoft.com/office/drawing/2014/main" xmlns="" id="{9AAE2E5B-3772-7BF4-7C5B-C632C605DD48}"/>
               </a:ext>
             </a:extLst>
           </p:cNvPr>
@@ -22120,7 +22179,7 @@
           <p:cNvPr id="22" name="Picture 2" descr="GitHub - OleksandrKosovan/dog-cat-classification: The Dogs vs. Cats dataset  is a standard computer vision dataset that involves classifying photos as  either containing a dog or cat.">
             <a:extLst>
               <a:ext uri="{FF2B5EF4-FFF2-40B4-BE49-F238E27FC236}">
-                <a16:creationId xmlns="" xmlns:a16="http://schemas.microsoft.com/office/drawing/2014/main" id="{EE1E65C9-48DF-4E81-A7B5-1AD012861478}"/>
+                <a16:creationId xmlns:a16="http://schemas.microsoft.com/office/drawing/2014/main" xmlns="" id="{EE1E65C9-48DF-4E81-A7B5-1AD012861478}"/>
               </a:ext>
             </a:extLst>
           </p:cNvPr>
@@ -22165,7 +22224,7 @@
           <p:cNvPr id="23" name="Conector reto 22">
             <a:extLst>
               <a:ext uri="{FF2B5EF4-FFF2-40B4-BE49-F238E27FC236}">
-                <a16:creationId xmlns="" xmlns:a16="http://schemas.microsoft.com/office/drawing/2014/main" id="{844E5B43-B454-78DC-3F77-FE69A5DF57CC}"/>
+                <a16:creationId xmlns:a16="http://schemas.microsoft.com/office/drawing/2014/main" xmlns="" id="{844E5B43-B454-78DC-3F77-FE69A5DF57CC}"/>
               </a:ext>
             </a:extLst>
           </p:cNvPr>
@@ -22209,7 +22268,7 @@
           <p:cNvPr id="26" name="Conector reto 25">
             <a:extLst>
               <a:ext uri="{FF2B5EF4-FFF2-40B4-BE49-F238E27FC236}">
-                <a16:creationId xmlns="" xmlns:a16="http://schemas.microsoft.com/office/drawing/2014/main" id="{F222145A-3D1B-B666-1B27-DB501E6102EC}"/>
+                <a16:creationId xmlns:a16="http://schemas.microsoft.com/office/drawing/2014/main" xmlns="" id="{F222145A-3D1B-B666-1B27-DB501E6102EC}"/>
               </a:ext>
             </a:extLst>
           </p:cNvPr>
@@ -24092,7 +24151,7 @@
           <p:cNvPr id="2" name="Group 49">
             <a:extLst>
               <a:ext uri="{FF2B5EF4-FFF2-40B4-BE49-F238E27FC236}">
-                <a16:creationId xmlns="" xmlns:a16="http://schemas.microsoft.com/office/drawing/2014/main" id="{A01877FB-57F2-AD41-82CB-EAC3CD6BE376}"/>
+                <a16:creationId xmlns:a16="http://schemas.microsoft.com/office/drawing/2014/main" xmlns="" id="{A01877FB-57F2-AD41-82CB-EAC3CD6BE376}"/>
               </a:ext>
             </a:extLst>
           </p:cNvPr>
@@ -24112,7 +24171,7 @@
             <p:cNvPr id="3" name="Straight Arrow Connector 4">
               <a:extLst>
                 <a:ext uri="{FF2B5EF4-FFF2-40B4-BE49-F238E27FC236}">
-                  <a16:creationId xmlns="" xmlns:a16="http://schemas.microsoft.com/office/drawing/2014/main" id="{559F5EC3-8BB0-7A49-4FC1-31DBAE0A5A53}"/>
+                  <a16:creationId xmlns:a16="http://schemas.microsoft.com/office/drawing/2014/main" xmlns="" id="{559F5EC3-8BB0-7A49-4FC1-31DBAE0A5A53}"/>
                 </a:ext>
               </a:extLst>
             </p:cNvPr>
@@ -24154,7 +24213,7 @@
             <p:cNvPr id="4" name="Straight Arrow Connector 5">
               <a:extLst>
                 <a:ext uri="{FF2B5EF4-FFF2-40B4-BE49-F238E27FC236}">
-                  <a16:creationId xmlns="" xmlns:a16="http://schemas.microsoft.com/office/drawing/2014/main" id="{DE64CED1-087D-F8C1-C8DE-ED77429386B6}"/>
+                  <a16:creationId xmlns:a16="http://schemas.microsoft.com/office/drawing/2014/main" xmlns="" id="{DE64CED1-087D-F8C1-C8DE-ED77429386B6}"/>
                 </a:ext>
               </a:extLst>
             </p:cNvPr>
@@ -24196,7 +24255,7 @@
             <p:cNvPr id="27" name="Oval 6">
               <a:extLst>
                 <a:ext uri="{FF2B5EF4-FFF2-40B4-BE49-F238E27FC236}">
-                  <a16:creationId xmlns="" xmlns:a16="http://schemas.microsoft.com/office/drawing/2014/main" id="{4BAC0974-32C4-6B7D-7B84-E15EC1A4EDAD}"/>
+                  <a16:creationId xmlns:a16="http://schemas.microsoft.com/office/drawing/2014/main" xmlns="" id="{4BAC0974-32C4-6B7D-7B84-E15EC1A4EDAD}"/>
                 </a:ext>
               </a:extLst>
             </p:cNvPr>
@@ -24250,7 +24309,7 @@
             <p:cNvPr id="29" name="Isosceles Triangle 7">
               <a:extLst>
                 <a:ext uri="{FF2B5EF4-FFF2-40B4-BE49-F238E27FC236}">
-                  <a16:creationId xmlns="" xmlns:a16="http://schemas.microsoft.com/office/drawing/2014/main" id="{0591E6DC-765A-BFBB-1F8D-DDEC4152C35F}"/>
+                  <a16:creationId xmlns:a16="http://schemas.microsoft.com/office/drawing/2014/main" xmlns="" id="{0591E6DC-765A-BFBB-1F8D-DDEC4152C35F}"/>
                 </a:ext>
               </a:extLst>
             </p:cNvPr>
@@ -24304,7 +24363,7 @@
             <p:cNvPr id="32" name="Straight Connector 8">
               <a:extLst>
                 <a:ext uri="{FF2B5EF4-FFF2-40B4-BE49-F238E27FC236}">
-                  <a16:creationId xmlns="" xmlns:a16="http://schemas.microsoft.com/office/drawing/2014/main" id="{E1734E95-0FBF-02AF-2569-135BB7B22E05}"/>
+                  <a16:creationId xmlns:a16="http://schemas.microsoft.com/office/drawing/2014/main" xmlns="" id="{E1734E95-0FBF-02AF-2569-135BB7B22E05}"/>
                 </a:ext>
               </a:extLst>
             </p:cNvPr>
@@ -24345,7 +24404,7 @@
             <p:cNvPr id="33" name="Oval 9">
               <a:extLst>
                 <a:ext uri="{FF2B5EF4-FFF2-40B4-BE49-F238E27FC236}">
-                  <a16:creationId xmlns="" xmlns:a16="http://schemas.microsoft.com/office/drawing/2014/main" id="{6B37EE68-5A0B-827B-8C98-DE6B17AC56E3}"/>
+                  <a16:creationId xmlns:a16="http://schemas.microsoft.com/office/drawing/2014/main" xmlns="" id="{6B37EE68-5A0B-827B-8C98-DE6B17AC56E3}"/>
                 </a:ext>
               </a:extLst>
             </p:cNvPr>
@@ -24399,7 +24458,7 @@
             <p:cNvPr id="34" name="Oval 10">
               <a:extLst>
                 <a:ext uri="{FF2B5EF4-FFF2-40B4-BE49-F238E27FC236}">
-                  <a16:creationId xmlns="" xmlns:a16="http://schemas.microsoft.com/office/drawing/2014/main" id="{1261DDC8-59C7-FD0B-DD60-BE3CB7FCDA62}"/>
+                  <a16:creationId xmlns:a16="http://schemas.microsoft.com/office/drawing/2014/main" xmlns="" id="{1261DDC8-59C7-FD0B-DD60-BE3CB7FCDA62}"/>
                 </a:ext>
               </a:extLst>
             </p:cNvPr>
@@ -24453,7 +24512,7 @@
             <p:cNvPr id="35" name="Oval 11">
               <a:extLst>
                 <a:ext uri="{FF2B5EF4-FFF2-40B4-BE49-F238E27FC236}">
-                  <a16:creationId xmlns="" xmlns:a16="http://schemas.microsoft.com/office/drawing/2014/main" id="{6B51829B-5A4D-3096-8DFA-23F65727F0A5}"/>
+                  <a16:creationId xmlns:a16="http://schemas.microsoft.com/office/drawing/2014/main" xmlns="" id="{6B51829B-5A4D-3096-8DFA-23F65727F0A5}"/>
                 </a:ext>
               </a:extLst>
             </p:cNvPr>
@@ -24507,7 +24566,7 @@
             <p:cNvPr id="37" name="Oval 12">
               <a:extLst>
                 <a:ext uri="{FF2B5EF4-FFF2-40B4-BE49-F238E27FC236}">
-                  <a16:creationId xmlns="" xmlns:a16="http://schemas.microsoft.com/office/drawing/2014/main" id="{1DCF8C81-BE56-28DB-0646-E7672E3BDC98}"/>
+                  <a16:creationId xmlns:a16="http://schemas.microsoft.com/office/drawing/2014/main" xmlns="" id="{1DCF8C81-BE56-28DB-0646-E7672E3BDC98}"/>
                 </a:ext>
               </a:extLst>
             </p:cNvPr>
@@ -24561,7 +24620,7 @@
             <p:cNvPr id="41" name="Oval 13">
               <a:extLst>
                 <a:ext uri="{FF2B5EF4-FFF2-40B4-BE49-F238E27FC236}">
-                  <a16:creationId xmlns="" xmlns:a16="http://schemas.microsoft.com/office/drawing/2014/main" id="{D4191678-9CF5-8B2C-2FFD-5FD130B3B412}"/>
+                  <a16:creationId xmlns:a16="http://schemas.microsoft.com/office/drawing/2014/main" xmlns="" id="{D4191678-9CF5-8B2C-2FFD-5FD130B3B412}"/>
                 </a:ext>
               </a:extLst>
             </p:cNvPr>
@@ -24615,7 +24674,7 @@
             <p:cNvPr id="42" name="Oval 14">
               <a:extLst>
                 <a:ext uri="{FF2B5EF4-FFF2-40B4-BE49-F238E27FC236}">
-                  <a16:creationId xmlns="" xmlns:a16="http://schemas.microsoft.com/office/drawing/2014/main" id="{15DAC9EB-F5F3-0131-4EAA-DF22D2351AB8}"/>
+                  <a16:creationId xmlns:a16="http://schemas.microsoft.com/office/drawing/2014/main" xmlns="" id="{15DAC9EB-F5F3-0131-4EAA-DF22D2351AB8}"/>
                 </a:ext>
               </a:extLst>
             </p:cNvPr>
@@ -24669,7 +24728,7 @@
             <p:cNvPr id="44" name="Isosceles Triangle 15">
               <a:extLst>
                 <a:ext uri="{FF2B5EF4-FFF2-40B4-BE49-F238E27FC236}">
-                  <a16:creationId xmlns="" xmlns:a16="http://schemas.microsoft.com/office/drawing/2014/main" id="{17847434-848F-7030-60BF-0A6AFF31EAEE}"/>
+                  <a16:creationId xmlns:a16="http://schemas.microsoft.com/office/drawing/2014/main" xmlns="" id="{17847434-848F-7030-60BF-0A6AFF31EAEE}"/>
                 </a:ext>
               </a:extLst>
             </p:cNvPr>
@@ -24723,7 +24782,7 @@
             <p:cNvPr id="45" name="Isosceles Triangle 16">
               <a:extLst>
                 <a:ext uri="{FF2B5EF4-FFF2-40B4-BE49-F238E27FC236}">
-                  <a16:creationId xmlns="" xmlns:a16="http://schemas.microsoft.com/office/drawing/2014/main" id="{69F7D8A7-7BB4-29BF-6783-381784D1576B}"/>
+                  <a16:creationId xmlns:a16="http://schemas.microsoft.com/office/drawing/2014/main" xmlns="" id="{69F7D8A7-7BB4-29BF-6783-381784D1576B}"/>
                 </a:ext>
               </a:extLst>
             </p:cNvPr>
@@ -24777,7 +24836,7 @@
             <p:cNvPr id="46" name="Isosceles Triangle 17">
               <a:extLst>
                 <a:ext uri="{FF2B5EF4-FFF2-40B4-BE49-F238E27FC236}">
-                  <a16:creationId xmlns="" xmlns:a16="http://schemas.microsoft.com/office/drawing/2014/main" id="{A7E0AD2F-77D1-2E5F-BC04-C0BD98EF8FB2}"/>
+                  <a16:creationId xmlns:a16="http://schemas.microsoft.com/office/drawing/2014/main" xmlns="" id="{A7E0AD2F-77D1-2E5F-BC04-C0BD98EF8FB2}"/>
                 </a:ext>
               </a:extLst>
             </p:cNvPr>
@@ -24831,7 +24890,7 @@
             <p:cNvPr id="47" name="Isosceles Triangle 18">
               <a:extLst>
                 <a:ext uri="{FF2B5EF4-FFF2-40B4-BE49-F238E27FC236}">
-                  <a16:creationId xmlns="" xmlns:a16="http://schemas.microsoft.com/office/drawing/2014/main" id="{1C15A1BA-A5A1-121A-47A2-67D01670EB8D}"/>
+                  <a16:creationId xmlns:a16="http://schemas.microsoft.com/office/drawing/2014/main" xmlns="" id="{1C15A1BA-A5A1-121A-47A2-67D01670EB8D}"/>
                 </a:ext>
               </a:extLst>
             </p:cNvPr>
@@ -24885,7 +24944,7 @@
             <p:cNvPr id="51" name="Isosceles Triangle 19">
               <a:extLst>
                 <a:ext uri="{FF2B5EF4-FFF2-40B4-BE49-F238E27FC236}">
-                  <a16:creationId xmlns="" xmlns:a16="http://schemas.microsoft.com/office/drawing/2014/main" id="{2691A117-2238-4EA8-BA72-DD69B2537E74}"/>
+                  <a16:creationId xmlns:a16="http://schemas.microsoft.com/office/drawing/2014/main" xmlns="" id="{2691A117-2238-4EA8-BA72-DD69B2537E74}"/>
                 </a:ext>
               </a:extLst>
             </p:cNvPr>
@@ -24939,7 +24998,7 @@
             <p:cNvPr id="52" name="Isosceles Triangle 20">
               <a:extLst>
                 <a:ext uri="{FF2B5EF4-FFF2-40B4-BE49-F238E27FC236}">
-                  <a16:creationId xmlns="" xmlns:a16="http://schemas.microsoft.com/office/drawing/2014/main" id="{87886991-92AA-789B-A048-42556E41EF78}"/>
+                  <a16:creationId xmlns:a16="http://schemas.microsoft.com/office/drawing/2014/main" xmlns="" id="{87886991-92AA-789B-A048-42556E41EF78}"/>
                 </a:ext>
               </a:extLst>
             </p:cNvPr>
@@ -24993,7 +25052,7 @@
             <p:cNvPr id="53" name="Isosceles Triangle 21">
               <a:extLst>
                 <a:ext uri="{FF2B5EF4-FFF2-40B4-BE49-F238E27FC236}">
-                  <a16:creationId xmlns="" xmlns:a16="http://schemas.microsoft.com/office/drawing/2014/main" id="{FC918483-70D9-78EF-7892-9A698C58B3BE}"/>
+                  <a16:creationId xmlns:a16="http://schemas.microsoft.com/office/drawing/2014/main" xmlns="" id="{FC918483-70D9-78EF-7892-9A698C58B3BE}"/>
                 </a:ext>
               </a:extLst>
             </p:cNvPr>
@@ -25049,7 +25108,7 @@
                 <p:cNvPr id="54" name="Rectangle 22">
                   <a:extLst>
                     <a:ext uri="{FF2B5EF4-FFF2-40B4-BE49-F238E27FC236}">
-                      <a16:creationId xmlns="" xmlns:a16="http://schemas.microsoft.com/office/drawing/2014/main" id="{2FE86596-1D83-0567-72ED-6BE31DAD111D}"/>
+                      <a16:creationId xmlns:a16="http://schemas.microsoft.com/office/drawing/2014/main" xmlns="" id="{2FE86596-1D83-0567-72ED-6BE31DAD111D}"/>
                     </a:ext>
                   </a:extLst>
                 </p:cNvPr>
@@ -25157,7 +25216,7 @@
                 <p:cNvPr id="55" name="Rectangle 23">
                   <a:extLst>
                     <a:ext uri="{FF2B5EF4-FFF2-40B4-BE49-F238E27FC236}">
-                      <a16:creationId xmlns="" xmlns:a16="http://schemas.microsoft.com/office/drawing/2014/main" id="{02397193-CB62-B516-6901-D12765FA74FD}"/>
+                      <a16:creationId xmlns:a16="http://schemas.microsoft.com/office/drawing/2014/main" xmlns="" id="{02397193-CB62-B516-6901-D12765FA74FD}"/>
                     </a:ext>
                   </a:extLst>
                 </p:cNvPr>
@@ -25265,7 +25324,7 @@
                 <p:cNvPr id="56" name="TextBox 24">
                   <a:extLst>
                     <a:ext uri="{FF2B5EF4-FFF2-40B4-BE49-F238E27FC236}">
-                      <a16:creationId xmlns="" xmlns:a16="http://schemas.microsoft.com/office/drawing/2014/main" id="{F29ADD8A-D74E-84D1-F235-CE5EA18629ED}"/>
+                      <a16:creationId xmlns:a16="http://schemas.microsoft.com/office/drawing/2014/main" xmlns="" id="{F29ADD8A-D74E-84D1-F235-CE5EA18629ED}"/>
                     </a:ext>
                   </a:extLst>
                 </p:cNvPr>
@@ -25374,7 +25433,7 @@
                 <p:cNvPr id="57" name="TextBox 25">
                   <a:extLst>
                     <a:ext uri="{FF2B5EF4-FFF2-40B4-BE49-F238E27FC236}">
-                      <a16:creationId xmlns="" xmlns:a16="http://schemas.microsoft.com/office/drawing/2014/main" id="{7A3F41DF-BDCB-C85B-90EB-7672C6BBB835}"/>
+                      <a16:creationId xmlns:a16="http://schemas.microsoft.com/office/drawing/2014/main" xmlns="" id="{7A3F41DF-BDCB-C85B-90EB-7672C6BBB835}"/>
                     </a:ext>
                   </a:extLst>
                 </p:cNvPr>
@@ -25481,7 +25540,7 @@
             <p:cNvPr id="58" name="Oval 27">
               <a:extLst>
                 <a:ext uri="{FF2B5EF4-FFF2-40B4-BE49-F238E27FC236}">
-                  <a16:creationId xmlns="" xmlns:a16="http://schemas.microsoft.com/office/drawing/2014/main" id="{847A52EB-C501-D440-8610-5419FB823317}"/>
+                  <a16:creationId xmlns:a16="http://schemas.microsoft.com/office/drawing/2014/main" xmlns="" id="{847A52EB-C501-D440-8610-5419FB823317}"/>
                 </a:ext>
               </a:extLst>
             </p:cNvPr>
@@ -25533,7 +25592,7 @@
             <p:cNvPr id="61" name="Oval 35">
               <a:extLst>
                 <a:ext uri="{FF2B5EF4-FFF2-40B4-BE49-F238E27FC236}">
-                  <a16:creationId xmlns="" xmlns:a16="http://schemas.microsoft.com/office/drawing/2014/main" id="{EB453B61-9506-A107-5EF7-8246E747FF1E}"/>
+                  <a16:creationId xmlns:a16="http://schemas.microsoft.com/office/drawing/2014/main" xmlns="" id="{EB453B61-9506-A107-5EF7-8246E747FF1E}"/>
                 </a:ext>
               </a:extLst>
             </p:cNvPr>
@@ -25585,7 +25644,7 @@
             <p:cNvPr id="62" name="Oval 37">
               <a:extLst>
                 <a:ext uri="{FF2B5EF4-FFF2-40B4-BE49-F238E27FC236}">
-                  <a16:creationId xmlns="" xmlns:a16="http://schemas.microsoft.com/office/drawing/2014/main" id="{CA70CD2A-20CC-7D7E-FBB5-315D08338E70}"/>
+                  <a16:creationId xmlns:a16="http://schemas.microsoft.com/office/drawing/2014/main" xmlns="" id="{CA70CD2A-20CC-7D7E-FBB5-315D08338E70}"/>
                 </a:ext>
               </a:extLst>
             </p:cNvPr>
@@ -25637,7 +25696,7 @@
             <p:cNvPr id="63" name="Isosceles Triangle 38">
               <a:extLst>
                 <a:ext uri="{FF2B5EF4-FFF2-40B4-BE49-F238E27FC236}">
-                  <a16:creationId xmlns="" xmlns:a16="http://schemas.microsoft.com/office/drawing/2014/main" id="{1B63DD9A-FDD2-7248-23B2-3CB843634382}"/>
+                  <a16:creationId xmlns:a16="http://schemas.microsoft.com/office/drawing/2014/main" xmlns="" id="{1B63DD9A-FDD2-7248-23B2-3CB843634382}"/>
                 </a:ext>
               </a:extLst>
             </p:cNvPr>
@@ -25693,7 +25752,7 @@
                 <p:cNvPr id="66" name="TextBox 47">
                   <a:extLst>
                     <a:ext uri="{FF2B5EF4-FFF2-40B4-BE49-F238E27FC236}">
-                      <a16:creationId xmlns="" xmlns:a16="http://schemas.microsoft.com/office/drawing/2014/main" id="{6063CA95-FC23-6B2F-BFA4-9A9FAF88B4A6}"/>
+                      <a16:creationId xmlns:a16="http://schemas.microsoft.com/office/drawing/2014/main" xmlns="" id="{6063CA95-FC23-6B2F-BFA4-9A9FAF88B4A6}"/>
                     </a:ext>
                   </a:extLst>
                 </p:cNvPr>
@@ -25806,7 +25865,7 @@
                 <p:cNvPr id="67" name="TextBox 48">
                   <a:extLst>
                     <a:ext uri="{FF2B5EF4-FFF2-40B4-BE49-F238E27FC236}">
-                      <a16:creationId xmlns="" xmlns:a16="http://schemas.microsoft.com/office/drawing/2014/main" id="{CF068210-CAED-73B7-26B0-19BA9DC8137E}"/>
+                      <a16:creationId xmlns:a16="http://schemas.microsoft.com/office/drawing/2014/main" xmlns="" id="{CF068210-CAED-73B7-26B0-19BA9DC8137E}"/>
                     </a:ext>
                   </a:extLst>
                 </p:cNvPr>
@@ -25923,6 +25982,13 @@
   <p:clrMapOvr>
     <a:masterClrMapping/>
   </p:clrMapOvr>
+  <p:timing>
+    <p:tnLst>
+      <p:par>
+        <p:cTn id="1" dur="indefinite" restart="never" nodeType="tmRoot"/>
+      </p:par>
+    </p:tnLst>
+  </p:timing>
 </p:sld>
 </file>
 
@@ -27992,7 +28058,7 @@
           <p:cNvPr id="6" name="TextBox 10">
             <a:extLst>
               <a:ext uri="{FF2B5EF4-FFF2-40B4-BE49-F238E27FC236}">
-                <a16:creationId xmlns="" xmlns:a16="http://schemas.microsoft.com/office/drawing/2014/main" id="{5C4B4108-2520-8F32-7ED8-A8D5762225C0}"/>
+                <a16:creationId xmlns:a16="http://schemas.microsoft.com/office/drawing/2014/main" xmlns="" id="{5C4B4108-2520-8F32-7ED8-A8D5762225C0}"/>
               </a:ext>
             </a:extLst>
           </p:cNvPr>
@@ -28044,7 +28110,7 @@
           <p:cNvPr id="7" name="Picture 3">
             <a:extLst>
               <a:ext uri="{FF2B5EF4-FFF2-40B4-BE49-F238E27FC236}">
-                <a16:creationId xmlns="" xmlns:a16="http://schemas.microsoft.com/office/drawing/2014/main" id="{18E14292-14A7-4B06-6830-9F831DD8A7A6}"/>
+                <a16:creationId xmlns:a16="http://schemas.microsoft.com/office/drawing/2014/main" xmlns="" id="{18E14292-14A7-4B06-6830-9F831DD8A7A6}"/>
               </a:ext>
             </a:extLst>
           </p:cNvPr>
@@ -28079,7 +28145,7 @@
           <p:cNvPr id="8" name="Picture 4">
             <a:extLst>
               <a:ext uri="{FF2B5EF4-FFF2-40B4-BE49-F238E27FC236}">
-                <a16:creationId xmlns="" xmlns:a16="http://schemas.microsoft.com/office/drawing/2014/main" id="{220E4A5A-F6C0-4DF4-14A9-6517D7BAD8FF}"/>
+                <a16:creationId xmlns:a16="http://schemas.microsoft.com/office/drawing/2014/main" xmlns="" id="{220E4A5A-F6C0-4DF4-14A9-6517D7BAD8FF}"/>
               </a:ext>
             </a:extLst>
           </p:cNvPr>
@@ -28114,7 +28180,7 @@
           <p:cNvPr id="9" name="TextBox 11">
             <a:extLst>
               <a:ext uri="{FF2B5EF4-FFF2-40B4-BE49-F238E27FC236}">
-                <a16:creationId xmlns="" xmlns:a16="http://schemas.microsoft.com/office/drawing/2014/main" id="{8ED363EC-FFE4-8465-8950-8EFDBEE4AA97}"/>
+                <a16:creationId xmlns:a16="http://schemas.microsoft.com/office/drawing/2014/main" xmlns="" id="{8ED363EC-FFE4-8465-8950-8EFDBEE4AA97}"/>
               </a:ext>
             </a:extLst>
           </p:cNvPr>
@@ -28162,7 +28228,7 @@
           <p:cNvPr id="14" name="Curved Connector 9">
             <a:extLst>
               <a:ext uri="{FF2B5EF4-FFF2-40B4-BE49-F238E27FC236}">
-                <a16:creationId xmlns="" xmlns:a16="http://schemas.microsoft.com/office/drawing/2014/main" id="{B8E4CCE2-8CD3-2DDD-9F9A-1C6C12E23FA9}"/>
+                <a16:creationId xmlns:a16="http://schemas.microsoft.com/office/drawing/2014/main" xmlns="" id="{B8E4CCE2-8CD3-2DDD-9F9A-1C6C12E23FA9}"/>
               </a:ext>
             </a:extLst>
           </p:cNvPr>
@@ -28209,7 +28275,7 @@
           <p:cNvPr id="17" name="TextBox 12">
             <a:extLst>
               <a:ext uri="{FF2B5EF4-FFF2-40B4-BE49-F238E27FC236}">
-                <a16:creationId xmlns="" xmlns:a16="http://schemas.microsoft.com/office/drawing/2014/main" id="{E58245ED-FDF9-96AD-E6EC-2F7C94A0B7E2}"/>
+                <a16:creationId xmlns:a16="http://schemas.microsoft.com/office/drawing/2014/main" xmlns="" id="{E58245ED-FDF9-96AD-E6EC-2F7C94A0B7E2}"/>
               </a:ext>
             </a:extLst>
           </p:cNvPr>
@@ -28257,7 +28323,7 @@
           <p:cNvPr id="18" name="TextBox 14">
             <a:extLst>
               <a:ext uri="{FF2B5EF4-FFF2-40B4-BE49-F238E27FC236}">
-                <a16:creationId xmlns="" xmlns:a16="http://schemas.microsoft.com/office/drawing/2014/main" id="{EF4FE9E1-2223-5403-959C-BACE49B9C0BB}"/>
+                <a16:creationId xmlns:a16="http://schemas.microsoft.com/office/drawing/2014/main" xmlns="" id="{EF4FE9E1-2223-5403-959C-BACE49B9C0BB}"/>
               </a:ext>
             </a:extLst>
           </p:cNvPr>
@@ -28293,7 +28359,7 @@
           <p:cNvPr id="19" name="TextBox 15">
             <a:extLst>
               <a:ext uri="{FF2B5EF4-FFF2-40B4-BE49-F238E27FC236}">
-                <a16:creationId xmlns="" xmlns:a16="http://schemas.microsoft.com/office/drawing/2014/main" id="{2D1AB59A-3453-53BF-02B0-2EA6510D278E}"/>
+                <a16:creationId xmlns:a16="http://schemas.microsoft.com/office/drawing/2014/main" xmlns="" id="{2D1AB59A-3453-53BF-02B0-2EA6510D278E}"/>
               </a:ext>
             </a:extLst>
           </p:cNvPr>
@@ -28359,7 +28425,7 @@
           <p:cNvPr id="2" name="Título 1">
             <a:extLst>
               <a:ext uri="{FF2B5EF4-FFF2-40B4-BE49-F238E27FC236}">
-                <a16:creationId xmlns="" xmlns:a16="http://schemas.microsoft.com/office/drawing/2014/main" id="{3495A63C-0894-86C7-670B-3F429FA243FC}"/>
+                <a16:creationId xmlns:a16="http://schemas.microsoft.com/office/drawing/2014/main" xmlns="" id="{3495A63C-0894-86C7-670B-3F429FA243FC}"/>
               </a:ext>
             </a:extLst>
           </p:cNvPr>
@@ -28389,7 +28455,7 @@
               <p:cNvPr id="3" name="Espaço Reservado para Conteúdo 2">
                 <a:extLst>
                   <a:ext uri="{FF2B5EF4-FFF2-40B4-BE49-F238E27FC236}">
-                    <a16:creationId xmlns="" xmlns:a16="http://schemas.microsoft.com/office/drawing/2014/main" id="{AB023315-E7E6-47FE-1333-C9490AC27BD4}"/>
+                    <a16:creationId xmlns:a16="http://schemas.microsoft.com/office/drawing/2014/main" xmlns="" id="{AB023315-E7E6-47FE-1333-C9490AC27BD4}"/>
                   </a:ext>
                 </a:extLst>
               </p:cNvPr>
@@ -29618,7 +29684,7 @@
           <p:cNvPr id="13" name="Agrupar 12">
             <a:extLst>
               <a:ext uri="{FF2B5EF4-FFF2-40B4-BE49-F238E27FC236}">
-                <a16:creationId xmlns="" xmlns:a16="http://schemas.microsoft.com/office/drawing/2014/main" id="{2B9489A0-43C9-F481-C89D-B77D90514774}"/>
+                <a16:creationId xmlns:a16="http://schemas.microsoft.com/office/drawing/2014/main" xmlns="" id="{2B9489A0-43C9-F481-C89D-B77D90514774}"/>
               </a:ext>
             </a:extLst>
           </p:cNvPr>
@@ -29638,7 +29704,7 @@
             <p:cNvPr id="6" name="Picture 3">
               <a:extLst>
                 <a:ext uri="{FF2B5EF4-FFF2-40B4-BE49-F238E27FC236}">
-                  <a16:creationId xmlns="" xmlns:a16="http://schemas.microsoft.com/office/drawing/2014/main" id="{4CD9C295-4EEF-10D5-87A5-FB0885539066}"/>
+                  <a16:creationId xmlns:a16="http://schemas.microsoft.com/office/drawing/2014/main" xmlns="" id="{4CD9C295-4EEF-10D5-87A5-FB0885539066}"/>
                 </a:ext>
               </a:extLst>
             </p:cNvPr>
@@ -29673,7 +29739,7 @@
             <p:cNvPr id="12" name="Forma Livre: Forma 11">
               <a:extLst>
                 <a:ext uri="{FF2B5EF4-FFF2-40B4-BE49-F238E27FC236}">
-                  <a16:creationId xmlns="" xmlns:a16="http://schemas.microsoft.com/office/drawing/2014/main" id="{F0E088D9-D778-25C4-93FD-A131A99C48A0}"/>
+                  <a16:creationId xmlns:a16="http://schemas.microsoft.com/office/drawing/2014/main" xmlns="" id="{F0E088D9-D778-25C4-93FD-A131A99C48A0}"/>
                 </a:ext>
               </a:extLst>
             </p:cNvPr>
@@ -29775,7 +29841,7 @@
           <p:cNvPr id="17" name="Imagem 16">
             <a:extLst>
               <a:ext uri="{FF2B5EF4-FFF2-40B4-BE49-F238E27FC236}">
-                <a16:creationId xmlns="" xmlns:a16="http://schemas.microsoft.com/office/drawing/2014/main" id="{1FF852E1-FC27-87CE-4AD8-93FE770BB709}"/>
+                <a16:creationId xmlns:a16="http://schemas.microsoft.com/office/drawing/2014/main" xmlns="" id="{1FF852E1-FC27-87CE-4AD8-93FE770BB709}"/>
               </a:ext>
             </a:extLst>
           </p:cNvPr>
@@ -29804,7 +29870,7 @@
           <p:cNvPr id="18" name="Elipse 17">
             <a:extLst>
               <a:ext uri="{FF2B5EF4-FFF2-40B4-BE49-F238E27FC236}">
-                <a16:creationId xmlns="" xmlns:a16="http://schemas.microsoft.com/office/drawing/2014/main" id="{54A56F1A-7CBB-5EB0-623A-D56498CD1D25}"/>
+                <a16:creationId xmlns:a16="http://schemas.microsoft.com/office/drawing/2014/main" xmlns="" id="{54A56F1A-7CBB-5EB0-623A-D56498CD1D25}"/>
               </a:ext>
             </a:extLst>
           </p:cNvPr>
@@ -29857,7 +29923,7 @@
           <p:cNvPr id="20" name="Conector de Seta Reta 19">
             <a:extLst>
               <a:ext uri="{FF2B5EF4-FFF2-40B4-BE49-F238E27FC236}">
-                <a16:creationId xmlns="" xmlns:a16="http://schemas.microsoft.com/office/drawing/2014/main" id="{B8C56CE2-655D-9F67-4479-7C25CEC7A4AD}"/>
+                <a16:creationId xmlns:a16="http://schemas.microsoft.com/office/drawing/2014/main" xmlns="" id="{B8C56CE2-655D-9F67-4479-7C25CEC7A4AD}"/>
               </a:ext>
             </a:extLst>
           </p:cNvPr>
@@ -29903,7 +29969,7 @@
               <p:cNvPr id="22" name="CaixaDeTexto 21">
                 <a:extLst>
                   <a:ext uri="{FF2B5EF4-FFF2-40B4-BE49-F238E27FC236}">
-                    <a16:creationId xmlns="" xmlns:a16="http://schemas.microsoft.com/office/drawing/2014/main" id="{F86B7526-8F2E-C225-228E-F0475FB39495}"/>
+                    <a16:creationId xmlns:a16="http://schemas.microsoft.com/office/drawing/2014/main" xmlns="" id="{F86B7526-8F2E-C225-228E-F0475FB39495}"/>
                   </a:ext>
                 </a:extLst>
               </p:cNvPr>
@@ -30023,7 +30089,7 @@
           <p:cNvPr id="23" name="Conector de Seta Reta 22">
             <a:extLst>
               <a:ext uri="{FF2B5EF4-FFF2-40B4-BE49-F238E27FC236}">
-                <a16:creationId xmlns="" xmlns:a16="http://schemas.microsoft.com/office/drawing/2014/main" id="{CB16F12A-6F3B-151C-8C84-E16F35E2EF7D}"/>
+                <a16:creationId xmlns:a16="http://schemas.microsoft.com/office/drawing/2014/main" xmlns="" id="{CB16F12A-6F3B-151C-8C84-E16F35E2EF7D}"/>
               </a:ext>
             </a:extLst>
           </p:cNvPr>
@@ -30069,7 +30135,7 @@
               <p:cNvPr id="24" name="CaixaDeTexto 23">
                 <a:extLst>
                   <a:ext uri="{FF2B5EF4-FFF2-40B4-BE49-F238E27FC236}">
-                    <a16:creationId xmlns="" xmlns:a16="http://schemas.microsoft.com/office/drawing/2014/main" id="{D55B1080-693D-2F06-7B95-7A479C457438}"/>
+                    <a16:creationId xmlns:a16="http://schemas.microsoft.com/office/drawing/2014/main" xmlns="" id="{D55B1080-693D-2F06-7B95-7A479C457438}"/>
                   </a:ext>
                 </a:extLst>
               </p:cNvPr>
@@ -30219,7 +30285,7 @@
           <p:cNvPr id="2" name="Título 1">
             <a:extLst>
               <a:ext uri="{FF2B5EF4-FFF2-40B4-BE49-F238E27FC236}">
-                <a16:creationId xmlns="" xmlns:a16="http://schemas.microsoft.com/office/drawing/2014/main" id="{9147CD5D-4047-7236-FE8C-6333CF960D70}"/>
+                <a16:creationId xmlns:a16="http://schemas.microsoft.com/office/drawing/2014/main" xmlns="" id="{9147CD5D-4047-7236-FE8C-6333CF960D70}"/>
               </a:ext>
             </a:extLst>
           </p:cNvPr>
@@ -30249,7 +30315,7 @@
               <p:cNvPr id="3" name="Espaço Reservado para Conteúdo 2">
                 <a:extLst>
                   <a:ext uri="{FF2B5EF4-FFF2-40B4-BE49-F238E27FC236}">
-                    <a16:creationId xmlns="" xmlns:a16="http://schemas.microsoft.com/office/drawing/2014/main" id="{A05B4EB0-4924-C01B-D7F8-B7CFF96841B2}"/>
+                    <a16:creationId xmlns:a16="http://schemas.microsoft.com/office/drawing/2014/main" xmlns="" id="{A05B4EB0-4924-C01B-D7F8-B7CFF96841B2}"/>
                   </a:ext>
                 </a:extLst>
               </p:cNvPr>
@@ -31469,7 +31535,7 @@
           <p:cNvPr id="23" name="Agrupar 22">
             <a:extLst>
               <a:ext uri="{FF2B5EF4-FFF2-40B4-BE49-F238E27FC236}">
-                <a16:creationId xmlns="" xmlns:a16="http://schemas.microsoft.com/office/drawing/2014/main" id="{51896EA7-CD7C-9502-0150-223B08803393}"/>
+                <a16:creationId xmlns:a16="http://schemas.microsoft.com/office/drawing/2014/main" xmlns="" id="{51896EA7-CD7C-9502-0150-223B08803393}"/>
               </a:ext>
             </a:extLst>
           </p:cNvPr>
@@ -31489,7 +31555,7 @@
             <p:cNvPr id="2050" name="Picture 2" descr="Dealing with nonlinear decision boundaries | Machine Learning for OpenCV 4  - Second Edition">
               <a:extLst>
                 <a:ext uri="{FF2B5EF4-FFF2-40B4-BE49-F238E27FC236}">
-                  <a16:creationId xmlns="" xmlns:a16="http://schemas.microsoft.com/office/drawing/2014/main" id="{5B5605AD-E772-CE0A-0D7E-F0FFFD068572}"/>
+                  <a16:creationId xmlns:a16="http://schemas.microsoft.com/office/drawing/2014/main" xmlns="" id="{5B5605AD-E772-CE0A-0D7E-F0FFFD068572}"/>
                 </a:ext>
               </a:extLst>
             </p:cNvPr>
@@ -31534,7 +31600,7 @@
             <p:cNvPr id="14" name="CaixaDeTexto 13">
               <a:extLst>
                 <a:ext uri="{FF2B5EF4-FFF2-40B4-BE49-F238E27FC236}">
-                  <a16:creationId xmlns="" xmlns:a16="http://schemas.microsoft.com/office/drawing/2014/main" id="{01FEAA26-817B-85EC-AB0F-1F7C32F36C52}"/>
+                  <a16:creationId xmlns:a16="http://schemas.microsoft.com/office/drawing/2014/main" xmlns="" id="{01FEAA26-817B-85EC-AB0F-1F7C32F36C52}"/>
                 </a:ext>
               </a:extLst>
             </p:cNvPr>
@@ -31572,7 +31638,7 @@
             <p:cNvPr id="15" name="CaixaDeTexto 14">
               <a:extLst>
                 <a:ext uri="{FF2B5EF4-FFF2-40B4-BE49-F238E27FC236}">
-                  <a16:creationId xmlns="" xmlns:a16="http://schemas.microsoft.com/office/drawing/2014/main" id="{44D24527-64AE-5BB7-A595-AA5F0BB168C3}"/>
+                  <a16:creationId xmlns:a16="http://schemas.microsoft.com/office/drawing/2014/main" xmlns="" id="{44D24527-64AE-5BB7-A595-AA5F0BB168C3}"/>
                 </a:ext>
               </a:extLst>
             </p:cNvPr>
@@ -31610,7 +31676,7 @@
             <p:cNvPr id="17" name="CaixaDeTexto 16">
               <a:extLst>
                 <a:ext uri="{FF2B5EF4-FFF2-40B4-BE49-F238E27FC236}">
-                  <a16:creationId xmlns="" xmlns:a16="http://schemas.microsoft.com/office/drawing/2014/main" id="{1C16CD85-D162-F019-EC12-01B0FCBCF88C}"/>
+                  <a16:creationId xmlns:a16="http://schemas.microsoft.com/office/drawing/2014/main" xmlns="" id="{1C16CD85-D162-F019-EC12-01B0FCBCF88C}"/>
                 </a:ext>
               </a:extLst>
             </p:cNvPr>
@@ -31648,7 +31714,7 @@
             <p:cNvPr id="19" name="CaixaDeTexto 18">
               <a:extLst>
                 <a:ext uri="{FF2B5EF4-FFF2-40B4-BE49-F238E27FC236}">
-                  <a16:creationId xmlns="" xmlns:a16="http://schemas.microsoft.com/office/drawing/2014/main" id="{5A47254A-34EE-516A-893F-46C77F281F14}"/>
+                  <a16:creationId xmlns:a16="http://schemas.microsoft.com/office/drawing/2014/main" xmlns="" id="{5A47254A-34EE-516A-893F-46C77F281F14}"/>
                 </a:ext>
               </a:extLst>
             </p:cNvPr>
@@ -31693,7 +31759,7 @@
             <p:cNvPr id="21" name="Conector de Seta Reta 20">
               <a:extLst>
                 <a:ext uri="{FF2B5EF4-FFF2-40B4-BE49-F238E27FC236}">
-                  <a16:creationId xmlns="" xmlns:a16="http://schemas.microsoft.com/office/drawing/2014/main" id="{8CD96EDB-E3AE-8B49-6434-0E99AC8FD86A}"/>
+                  <a16:creationId xmlns:a16="http://schemas.microsoft.com/office/drawing/2014/main" xmlns="" id="{8CD96EDB-E3AE-8B49-6434-0E99AC8FD86A}"/>
                 </a:ext>
               </a:extLst>
             </p:cNvPr>
@@ -31769,7 +31835,7 @@
           <p:cNvPr id="2" name="Título 1">
             <a:extLst>
               <a:ext uri="{FF2B5EF4-FFF2-40B4-BE49-F238E27FC236}">
-                <a16:creationId xmlns="" xmlns:a16="http://schemas.microsoft.com/office/drawing/2014/main" id="{5D1F02FD-3573-18C5-6B1F-6FB93C24215E}"/>
+                <a16:creationId xmlns:a16="http://schemas.microsoft.com/office/drawing/2014/main" xmlns="" id="{5D1F02FD-3573-18C5-6B1F-6FB93C24215E}"/>
               </a:ext>
             </a:extLst>
           </p:cNvPr>
@@ -31799,7 +31865,7 @@
               <p:cNvPr id="3" name="Espaço Reservado para Conteúdo 2">
                 <a:extLst>
                   <a:ext uri="{FF2B5EF4-FFF2-40B4-BE49-F238E27FC236}">
-                    <a16:creationId xmlns="" xmlns:a16="http://schemas.microsoft.com/office/drawing/2014/main" id="{CA5EA8E2-9C93-A464-A824-B648FE8ECA8E}"/>
+                    <a16:creationId xmlns:a16="http://schemas.microsoft.com/office/drawing/2014/main" xmlns="" id="{CA5EA8E2-9C93-A464-A824-B648FE8ECA8E}"/>
                   </a:ext>
                 </a:extLst>
               </p:cNvPr>
@@ -32415,7 +32481,7 @@
           <p:cNvPr id="4" name="Group 11">
             <a:extLst>
               <a:ext uri="{FF2B5EF4-FFF2-40B4-BE49-F238E27FC236}">
-                <a16:creationId xmlns="" xmlns:a16="http://schemas.microsoft.com/office/drawing/2014/main" id="{AE4F4277-6964-0C1E-0DD3-569D7AE44CFF}"/>
+                <a16:creationId xmlns:a16="http://schemas.microsoft.com/office/drawing/2014/main" xmlns="" id="{AE4F4277-6964-0C1E-0DD3-569D7AE44CFF}"/>
               </a:ext>
             </a:extLst>
           </p:cNvPr>
@@ -32435,7 +32501,7 @@
             <p:cNvPr id="5" name="TextBox 4">
               <a:extLst>
                 <a:ext uri="{FF2B5EF4-FFF2-40B4-BE49-F238E27FC236}">
-                  <a16:creationId xmlns="" xmlns:a16="http://schemas.microsoft.com/office/drawing/2014/main" id="{27E02729-99B0-0A9C-BFBC-8A2DA40E9922}"/>
+                  <a16:creationId xmlns:a16="http://schemas.microsoft.com/office/drawing/2014/main" xmlns="" id="{27E02729-99B0-0A9C-BFBC-8A2DA40E9922}"/>
                 </a:ext>
               </a:extLst>
             </p:cNvPr>
@@ -32487,7 +32553,7 @@
             <p:cNvPr id="6" name="Group 5">
               <a:extLst>
                 <a:ext uri="{FF2B5EF4-FFF2-40B4-BE49-F238E27FC236}">
-                  <a16:creationId xmlns="" xmlns:a16="http://schemas.microsoft.com/office/drawing/2014/main" id="{747F032D-ACF4-5F87-06B9-C7A56B4B81C1}"/>
+                  <a16:creationId xmlns:a16="http://schemas.microsoft.com/office/drawing/2014/main" xmlns="" id="{747F032D-ACF4-5F87-06B9-C7A56B4B81C1}"/>
                 </a:ext>
               </a:extLst>
             </p:cNvPr>
@@ -32507,7 +32573,7 @@
               <p:cNvPr id="8" name="Group 6">
                 <a:extLst>
                   <a:ext uri="{FF2B5EF4-FFF2-40B4-BE49-F238E27FC236}">
-                    <a16:creationId xmlns="" xmlns:a16="http://schemas.microsoft.com/office/drawing/2014/main" id="{1C779583-0B37-EC5B-B6F1-0D8459340FB7}"/>
+                    <a16:creationId xmlns:a16="http://schemas.microsoft.com/office/drawing/2014/main" xmlns="" id="{1C779583-0B37-EC5B-B6F1-0D8459340FB7}"/>
                   </a:ext>
                 </a:extLst>
               </p:cNvPr>
@@ -32527,7 +32593,7 @@
                 <p:cNvPr id="11" name="Picture 9">
                   <a:extLst>
                     <a:ext uri="{FF2B5EF4-FFF2-40B4-BE49-F238E27FC236}">
-                      <a16:creationId xmlns="" xmlns:a16="http://schemas.microsoft.com/office/drawing/2014/main" id="{5EDAFFC9-D7AA-48D9-9403-C033C61678E3}"/>
+                      <a16:creationId xmlns:a16="http://schemas.microsoft.com/office/drawing/2014/main" xmlns="" id="{5EDAFFC9-D7AA-48D9-9403-C033C61678E3}"/>
                     </a:ext>
                   </a:extLst>
                 </p:cNvPr>
@@ -32556,7 +32622,7 @@
                 <p:cNvPr id="12" name="Straight Connector 10">
                   <a:extLst>
                     <a:ext uri="{FF2B5EF4-FFF2-40B4-BE49-F238E27FC236}">
-                      <a16:creationId xmlns="" xmlns:a16="http://schemas.microsoft.com/office/drawing/2014/main" id="{69C23BC7-60E3-3B5A-BCC8-7053B9A6F855}"/>
+                      <a16:creationId xmlns:a16="http://schemas.microsoft.com/office/drawing/2014/main" xmlns="" id="{69C23BC7-60E3-3B5A-BCC8-7053B9A6F855}"/>
                     </a:ext>
                   </a:extLst>
                 </p:cNvPr>
@@ -32599,7 +32665,7 @@
               <p:cNvPr id="9" name="TextBox 7">
                 <a:extLst>
                   <a:ext uri="{FF2B5EF4-FFF2-40B4-BE49-F238E27FC236}">
-                    <a16:creationId xmlns="" xmlns:a16="http://schemas.microsoft.com/office/drawing/2014/main" id="{2648BF23-0635-71F0-258F-B7728EA4A750}"/>
+                    <a16:creationId xmlns:a16="http://schemas.microsoft.com/office/drawing/2014/main" xmlns="" id="{2648BF23-0635-71F0-258F-B7728EA4A750}"/>
                   </a:ext>
                 </a:extLst>
               </p:cNvPr>
@@ -32647,7 +32713,7 @@
               <p:cNvPr id="10" name="TextBox 8">
                 <a:extLst>
                   <a:ext uri="{FF2B5EF4-FFF2-40B4-BE49-F238E27FC236}">
-                    <a16:creationId xmlns="" xmlns:a16="http://schemas.microsoft.com/office/drawing/2014/main" id="{D97F304C-2141-D333-74F5-8CCC51F5313F}"/>
+                    <a16:creationId xmlns:a16="http://schemas.microsoft.com/office/drawing/2014/main" xmlns="" id="{D97F304C-2141-D333-74F5-8CCC51F5313F}"/>
                   </a:ext>
                 </a:extLst>
               </p:cNvPr>
@@ -32696,7 +32762,7 @@
             <p:cNvPr id="7" name="Curved Connector 3">
               <a:extLst>
                 <a:ext uri="{FF2B5EF4-FFF2-40B4-BE49-F238E27FC236}">
-                  <a16:creationId xmlns="" xmlns:a16="http://schemas.microsoft.com/office/drawing/2014/main" id="{5C7C173C-95FF-CFC4-3A67-7626A47D5636}"/>
+                  <a16:creationId xmlns:a16="http://schemas.microsoft.com/office/drawing/2014/main" xmlns="" id="{5C7C173C-95FF-CFC4-3A67-7626A47D5636}"/>
                 </a:ext>
               </a:extLst>
             </p:cNvPr>
@@ -32742,7 +32808,7 @@
           <p:cNvPr id="13" name="CaixaDeTexto 12">
             <a:extLst>
               <a:ext uri="{FF2B5EF4-FFF2-40B4-BE49-F238E27FC236}">
-                <a16:creationId xmlns="" xmlns:a16="http://schemas.microsoft.com/office/drawing/2014/main" id="{A40DACEC-8E74-41F6-973B-1B4806F9D4C4}"/>
+                <a16:creationId xmlns:a16="http://schemas.microsoft.com/office/drawing/2014/main" xmlns="" id="{A40DACEC-8E74-41F6-973B-1B4806F9D4C4}"/>
               </a:ext>
             </a:extLst>
           </p:cNvPr>
@@ -32787,7 +32853,7 @@
           <p:cNvPr id="14" name="Chave direita 13">
             <a:extLst>
               <a:ext uri="{FF2B5EF4-FFF2-40B4-BE49-F238E27FC236}">
-                <a16:creationId xmlns="" xmlns:a16="http://schemas.microsoft.com/office/drawing/2014/main" id="{6285E6BF-6187-7ADC-6E46-0184AE45718E}"/>
+                <a16:creationId xmlns:a16="http://schemas.microsoft.com/office/drawing/2014/main" xmlns="" id="{6285E6BF-6187-7ADC-6E46-0184AE45718E}"/>
               </a:ext>
             </a:extLst>
           </p:cNvPr>
